--- a/04-Closing/DECK-CLOSING-4-POSITIONS-Helpdesk-IT.pptx
+++ b/04-Closing/DECK-CLOSING-4-POSITIONS-Helpdesk-IT.pptx
@@ -18,9 +18,11 @@
     <p:sldId id="266" r:id="rId12"/>
     <p:sldId id="267" r:id="rId13"/>
     <p:sldId id="268" r:id="rId14"/>
+    <p:sldId id="269" r:id="rId15"/>
+    <p:sldId id="270" r:id="rId16"/>
   </p:sldIdLst>
   <p:notesMasterIdLst>
-    <p:notesMasterId r:id="rId15"/>
+    <p:notesMasterId r:id="rId17"/>
   </p:notesMasterIdLst>
   <p:sldSz cx="12192000" cy="6858000"/>
   <p:notesSz cx="6858000" cy="12192000"/>
@@ -890,6 +892,182 @@
             <a:fld id="{F7021451-1387-4CA6-816F-3879F97B5CBC}" type="slidenum">
               <a:rPr lang="en-US"/>
               <a:t>13</a:t>
+            </a:fld>
+            <a:endParaRPr lang="en-US"/>
+          </a:p>
+        </p:txBody>
+      </p:sp>
+    </p:spTree>
+    <p:extLst>
+      <p:ext uri="{BB962C8B-B14F-4D97-AF65-F5344CB8AC3E}">
+        <p14:creationId xmlns:p14="http://schemas.microsoft.com/office/powerpoint/2010/main" val="1024086991"/>
+      </p:ext>
+    </p:extLst>
+  </p:cSld>
+  <p:clrMapOvr>
+    <a:masterClrMapping/>
+  </p:clrMapOvr>
+</p:notes>
+</file>
+
+<file path=ppt/notesSlides/notesSlide14.xml><?xml version="1.0" encoding="utf-8"?>
+<p:notes xmlns:a="http://schemas.openxmlformats.org/drawingml/2006/main" xmlns:r="http://schemas.openxmlformats.org/officeDocument/2006/relationships" xmlns:p="http://schemas.openxmlformats.org/presentationml/2006/main">
+  <p:cSld>
+    <p:spTree>
+      <p:nvGrpSpPr>
+        <p:cNvPr id="1" name=""/>
+        <p:cNvGrpSpPr/>
+        <p:nvPr/>
+      </p:nvGrpSpPr>
+      <p:grpSpPr>
+        <a:xfrm>
+          <a:off x="0" y="0"/>
+          <a:ext cx="0" cy="0"/>
+          <a:chOff x="0" y="0"/>
+          <a:chExt cx="0" cy="0"/>
+        </a:xfrm>
+      </p:grpSpPr>
+      <p:sp>
+        <p:nvSpPr>
+          <p:cNvPr id="2" name="Slide Image Placeholder 1"/>
+          <p:cNvSpPr>
+            <a:spLocks noGrp="1" noRot="1" noChangeAspect="1"/>
+          </p:cNvSpPr>
+          <p:nvPr>
+            <p:ph type="sldImg"/>
+          </p:nvPr>
+        </p:nvSpPr>
+        <p:spPr/>
+      </p:sp>
+      <p:sp>
+        <p:nvSpPr>
+          <p:cNvPr id="3" name="Notes Placeholder 2"/>
+          <p:cNvSpPr>
+            <a:spLocks noGrp="1"/>
+          </p:cNvSpPr>
+          <p:nvPr>
+            <p:ph type="body" idx="1"/>
+          </p:nvPr>
+        </p:nvSpPr>
+        <p:spPr/>
+        <p:txBody>
+          <a:bodyPr/>
+          <a:lstStyle/>
+          <a:p>
+            <a:r>
+              <a:rPr lang="en-US" dirty="0"/>
+              <a:t>Ne pas ouvrir là-dessus : cela double le prix affiché. Le bon déclencheur est l'objection de résilience — « et si votre agent tombe malade ? ». Priority devient alors la réponse, pas une montée en gamme. Côté marge, c'est +2 280 €/mois à effectif identique : c'est le vrai upsell du deal, très loin devant la 5e position.</a:t>
+            </a:r>
+            <a:endParaRPr lang="en-US" dirty="0"/>
+          </a:p>
+        </p:txBody>
+      </p:sp>
+      <p:sp>
+        <p:nvSpPr>
+          <p:cNvPr id="4" name="Slide Number Placeholder 3"/>
+          <p:cNvSpPr>
+            <a:spLocks noGrp="1"/>
+          </p:cNvSpPr>
+          <p:nvPr>
+            <p:ph type="sldNum" sz="quarter" idx="10"/>
+          </p:nvPr>
+        </p:nvSpPr>
+        <p:spPr/>
+        <p:txBody>
+          <a:bodyPr/>
+          <a:lstStyle/>
+          <a:p>
+            <a:fld id="{F7021451-1387-4CA6-816F-3879F97B5CBC}" type="slidenum">
+              <a:rPr lang="en-US"/>
+              <a:t>14</a:t>
+            </a:fld>
+            <a:endParaRPr lang="en-US"/>
+          </a:p>
+        </p:txBody>
+      </p:sp>
+    </p:spTree>
+    <p:extLst>
+      <p:ext uri="{BB962C8B-B14F-4D97-AF65-F5344CB8AC3E}">
+        <p14:creationId xmlns:p14="http://schemas.microsoft.com/office/powerpoint/2010/main" val="1024086991"/>
+      </p:ext>
+    </p:extLst>
+  </p:cSld>
+  <p:clrMapOvr>
+    <a:masterClrMapping/>
+  </p:clrMapOvr>
+</p:notes>
+</file>
+
+<file path=ppt/notesSlides/notesSlide15.xml><?xml version="1.0" encoding="utf-8"?>
+<p:notes xmlns:a="http://schemas.openxmlformats.org/drawingml/2006/main" xmlns:r="http://schemas.openxmlformats.org/officeDocument/2006/relationships" xmlns:p="http://schemas.openxmlformats.org/presentationml/2006/main">
+  <p:cSld>
+    <p:spTree>
+      <p:nvGrpSpPr>
+        <p:cNvPr id="1" name=""/>
+        <p:cNvGrpSpPr/>
+        <p:nvPr/>
+      </p:nvGrpSpPr>
+      <p:grpSpPr>
+        <a:xfrm>
+          <a:off x="0" y="0"/>
+          <a:ext cx="0" cy="0"/>
+          <a:chOff x="0" y="0"/>
+          <a:chExt cx="0" cy="0"/>
+        </a:xfrm>
+      </p:grpSpPr>
+      <p:sp>
+        <p:nvSpPr>
+          <p:cNvPr id="2" name="Slide Image Placeholder 1"/>
+          <p:cNvSpPr>
+            <a:spLocks noGrp="1" noRot="1" noChangeAspect="1"/>
+          </p:cNvSpPr>
+          <p:nvPr>
+            <p:ph type="sldImg"/>
+          </p:nvPr>
+        </p:nvSpPr>
+        <p:spPr/>
+      </p:sp>
+      <p:sp>
+        <p:nvSpPr>
+          <p:cNvPr id="3" name="Notes Placeholder 2"/>
+          <p:cNvSpPr>
+            <a:spLocks noGrp="1"/>
+          </p:cNvSpPr>
+          <p:nvPr>
+            <p:ph type="body" idx="1"/>
+          </p:nvPr>
+        </p:nvSpPr>
+        <p:spPr/>
+        <p:txBody>
+          <a:bodyPr/>
+          <a:lstStyle/>
+          <a:p>
+            <a:r>
+              <a:rPr lang="en-US" dirty="0"/>
+              <a:t>PRIX À VALIDER avant de montrer ce slide : cette grille est une proposition (PRICING.md §3.c), pas encore actée. Ne jamais concéder une amplitude gratuitement pour débloquer une signature — c'est 200 à 520 € par mois pendant toute la durée du contrat. Le bon moment pour la vendre est M+2/M+3, quand le reporting montre le besoin.</a:t>
+            </a:r>
+            <a:endParaRPr lang="en-US" dirty="0"/>
+          </a:p>
+        </p:txBody>
+      </p:sp>
+      <p:sp>
+        <p:nvSpPr>
+          <p:cNvPr id="4" name="Slide Number Placeholder 3"/>
+          <p:cNvSpPr>
+            <a:spLocks noGrp="1"/>
+          </p:cNvSpPr>
+          <p:nvPr>
+            <p:ph type="sldNum" sz="quarter" idx="10"/>
+          </p:nvPr>
+        </p:nvSpPr>
+        <p:spPr/>
+        <p:txBody>
+          <a:bodyPr/>
+          <a:lstStyle/>
+          <a:p>
+            <a:fld id="{F7021451-1387-4CA6-816F-3879F97B5CBC}" type="slidenum">
+              <a:rPr lang="en-US"/>
+              <a:t>15</a:t>
             </a:fld>
             <a:endParaRPr lang="en-US"/>
           </a:p>
@@ -6128,6 +6306,2186 @@
 </p:sld>
 </file>
 
+<file path=ppt/slides/slide14.xml><?xml version="1.0" encoding="utf-8"?>
+<p:sld xmlns:a="http://schemas.openxmlformats.org/drawingml/2006/main" xmlns:r="http://schemas.openxmlformats.org/officeDocument/2006/relationships" xmlns:p="http://schemas.openxmlformats.org/presentationml/2006/main">
+  <p:cSld name="Slide 14">
+    <p:bg>
+      <p:bgPr>
+        <a:solidFill>
+          <a:srgbClr val="FFFFFF"/>
+        </a:solidFill>
+      </p:bgPr>
+    </p:bg>
+    <p:spTree>
+      <p:nvGrpSpPr>
+        <p:cNvPr id="1" name=""/>
+        <p:cNvGrpSpPr/>
+        <p:nvPr/>
+      </p:nvGrpSpPr>
+      <p:grpSpPr>
+        <a:xfrm>
+          <a:off x="0" y="0"/>
+          <a:ext cx="0" cy="0"/>
+          <a:chOff x="0" y="0"/>
+          <a:chExt cx="0" cy="0"/>
+        </a:xfrm>
+      </p:grpSpPr>
+      <p:sp>
+        <p:nvSpPr>
+          <p:cNvPr id="2" name="Text 0"/>
+          <p:cNvSpPr/>
+          <p:nvPr/>
+        </p:nvSpPr>
+        <p:spPr>
+          <a:xfrm>
+            <a:off x="594360" y="384048"/>
+            <a:ext cx="10972800" cy="237744"/>
+          </a:xfrm>
+          <a:prstGeom prst="rect">
+            <a:avLst/>
+          </a:prstGeom>
+          <a:noFill/>
+          <a:ln/>
+        </p:spPr>
+        <p:txBody>
+          <a:bodyPr wrap="square" lIns="0" tIns="0" rIns="0" bIns="0" rtlCol="0" anchor="ctr"/>
+          <a:lstStyle/>
+          <a:p>
+            <a:pPr indent="0" marL="0">
+              <a:buNone/>
+            </a:pPr>
+            <a:r>
+              <a:rPr lang="en-US" sz="1100" b="1" spc="220" kern="0" dirty="0">
+                <a:solidFill>
+                  <a:srgbClr val="6B7B85"/>
+                </a:solidFill>
+                <a:latin typeface="Calibri" pitchFamily="34" charset="0"/>
+                <a:ea typeface="Calibri" pitchFamily="34" charset="-122"/>
+                <a:cs typeface="Calibri" pitchFamily="34" charset="-120"/>
+              </a:rPr>
+              <a:t>ANNEXE — SI LA QUESTION DE LA RÉSILIENCE SE POSE</a:t>
+            </a:r>
+            <a:endParaRPr lang="en-US" sz="1100" dirty="0"/>
+          </a:p>
+        </p:txBody>
+      </p:sp>
+      <p:sp>
+        <p:nvSpPr>
+          <p:cNvPr id="3" name="Text 1"/>
+          <p:cNvSpPr/>
+          <p:nvPr/>
+        </p:nvSpPr>
+        <p:spPr>
+          <a:xfrm>
+            <a:off x="594360" y="658368"/>
+            <a:ext cx="10972800" cy="822960"/>
+          </a:xfrm>
+          <a:prstGeom prst="rect">
+            <a:avLst/>
+          </a:prstGeom>
+          <a:noFill/>
+          <a:ln/>
+        </p:spPr>
+        <p:txBody>
+          <a:bodyPr wrap="square" lIns="0" tIns="0" rIns="0" bIns="0" rtlCol="0" anchor="t"/>
+          <a:lstStyle/>
+          <a:p>
+            <a:pPr indent="0" marL="0">
+              <a:buNone/>
+            </a:pPr>
+            <a:r>
+              <a:rPr lang="en-US" sz="3400" b="1" dirty="0">
+                <a:solidFill>
+                  <a:srgbClr val="013C58"/>
+                </a:solidFill>
+                <a:latin typeface="Cambria" pitchFamily="34" charset="0"/>
+                <a:ea typeface="Cambria" pitchFamily="34" charset="-122"/>
+                <a:cs typeface="Cambria" pitchFamily="34" charset="-120"/>
+              </a:rPr>
+              <a:t>Zéro rupture : l'option Priority</a:t>
+            </a:r>
+            <a:endParaRPr lang="en-US" sz="3400" dirty="0"/>
+          </a:p>
+        </p:txBody>
+      </p:sp>
+      <p:sp>
+        <p:nvSpPr>
+          <p:cNvPr id="4" name="Text 2"/>
+          <p:cNvSpPr/>
+          <p:nvPr/>
+        </p:nvSpPr>
+        <p:spPr>
+          <a:xfrm>
+            <a:off x="594360" y="1572768"/>
+            <a:ext cx="10972800" cy="457200"/>
+          </a:xfrm>
+          <a:prstGeom prst="rect">
+            <a:avLst/>
+          </a:prstGeom>
+          <a:noFill/>
+          <a:ln/>
+        </p:spPr>
+        <p:txBody>
+          <a:bodyPr wrap="square" lIns="0" tIns="0" rIns="0" bIns="0" rtlCol="0" anchor="ctr"/>
+          <a:lstStyle/>
+          <a:p>
+            <a:pPr indent="0" marL="0">
+              <a:buNone/>
+            </a:pPr>
+            <a:r>
+              <a:rPr lang="en-US" sz="1350" dirty="0">
+                <a:solidFill>
+                  <a:srgbClr val="6B7B85"/>
+                </a:solidFill>
+                <a:latin typeface="Calibri" pitchFamily="34" charset="0"/>
+                <a:ea typeface="Calibri" pitchFamily="34" charset="-122"/>
+                <a:cs typeface="Calibri" pitchFamily="34" charset="-120"/>
+              </a:rPr>
+              <a:t>En dédié, une absence est couverte par notre backup mutualisé. En Priority, le backup est réservé à votre compte : il ne sert personne d'autre, et votre file passe en premier.</a:t>
+            </a:r>
+            <a:endParaRPr lang="en-US" sz="1350" dirty="0"/>
+          </a:p>
+        </p:txBody>
+      </p:sp>
+      <p:sp>
+        <p:nvSpPr>
+          <p:cNvPr id="5" name="Shape 3"/>
+          <p:cNvSpPr/>
+          <p:nvPr/>
+        </p:nvSpPr>
+        <p:spPr>
+          <a:xfrm>
+            <a:off x="594360" y="2194560"/>
+            <a:ext cx="5349240" cy="2148840"/>
+          </a:xfrm>
+          <a:prstGeom prst="roundRect">
+            <a:avLst>
+              <a:gd name="adj" fmla="val 3830"/>
+            </a:avLst>
+          </a:prstGeom>
+          <a:solidFill>
+            <a:srgbClr val="EDF2F5"/>
+          </a:solidFill>
+          <a:ln w="12700">
+            <a:solidFill>
+              <a:srgbClr val="EDF2F5"/>
+            </a:solidFill>
+            <a:prstDash val="solid"/>
+          </a:ln>
+        </p:spPr>
+      </p:sp>
+      <p:sp>
+        <p:nvSpPr>
+          <p:cNvPr id="6" name="Text 4"/>
+          <p:cNvSpPr/>
+          <p:nvPr/>
+        </p:nvSpPr>
+        <p:spPr>
+          <a:xfrm>
+            <a:off x="914400" y="2395728"/>
+            <a:ext cx="4709160" cy="274320"/>
+          </a:xfrm>
+          <a:prstGeom prst="rect">
+            <a:avLst/>
+          </a:prstGeom>
+          <a:noFill/>
+          <a:ln/>
+        </p:spPr>
+        <p:txBody>
+          <a:bodyPr wrap="square" lIns="0" tIns="0" rIns="0" bIns="0" rtlCol="0" anchor="ctr"/>
+          <a:lstStyle/>
+          <a:p>
+            <a:pPr indent="0" marL="0">
+              <a:buNone/>
+            </a:pPr>
+            <a:r>
+              <a:rPr lang="en-US" sz="1100" b="1" spc="150" kern="0" dirty="0">
+                <a:solidFill>
+                  <a:srgbClr val="6B7B85"/>
+                </a:solidFill>
+                <a:latin typeface="Calibri" pitchFamily="34" charset="0"/>
+                <a:ea typeface="Calibri" pitchFamily="34" charset="-122"/>
+                <a:cs typeface="Calibri" pitchFamily="34" charset="-120"/>
+              </a:rPr>
+              <a:t>QUATRE POSITIONS DÉDIÉES</a:t>
+            </a:r>
+            <a:endParaRPr lang="en-US" sz="1100" dirty="0"/>
+          </a:p>
+        </p:txBody>
+      </p:sp>
+      <p:sp>
+        <p:nvSpPr>
+          <p:cNvPr id="7" name="Text 5"/>
+          <p:cNvSpPr/>
+          <p:nvPr/>
+        </p:nvSpPr>
+        <p:spPr>
+          <a:xfrm>
+            <a:off x="914400" y="2706624"/>
+            <a:ext cx="4709160" cy="594360"/>
+          </a:xfrm>
+          <a:prstGeom prst="rect">
+            <a:avLst/>
+          </a:prstGeom>
+          <a:noFill/>
+          <a:ln/>
+        </p:spPr>
+        <p:txBody>
+          <a:bodyPr wrap="square" lIns="0" tIns="0" rIns="0" bIns="0" rtlCol="0" anchor="ctr"/>
+          <a:lstStyle/>
+          <a:p>
+            <a:pPr indent="0" marL="0">
+              <a:buNone/>
+            </a:pPr>
+            <a:r>
+              <a:rPr lang="en-US" sz="3000" b="1" dirty="0">
+                <a:solidFill>
+                  <a:srgbClr val="1A2B34"/>
+                </a:solidFill>
+                <a:latin typeface="Cambria" pitchFamily="34" charset="0"/>
+                <a:ea typeface="Cambria" pitchFamily="34" charset="-122"/>
+                <a:cs typeface="Cambria" pitchFamily="34" charset="-120"/>
+              </a:rPr>
+              <a:t>7 000 € / mois</a:t>
+            </a:r>
+            <a:endParaRPr lang="en-US" sz="3000" dirty="0"/>
+          </a:p>
+        </p:txBody>
+      </p:sp>
+      <p:sp>
+        <p:nvSpPr>
+          <p:cNvPr id="8" name="Text 6"/>
+          <p:cNvSpPr/>
+          <p:nvPr/>
+        </p:nvSpPr>
+        <p:spPr>
+          <a:xfrm>
+            <a:off x="914400" y="3364992"/>
+            <a:ext cx="4709160" cy="822960"/>
+          </a:xfrm>
+          <a:prstGeom prst="rect">
+            <a:avLst/>
+          </a:prstGeom>
+          <a:noFill/>
+          <a:ln/>
+        </p:spPr>
+        <p:txBody>
+          <a:bodyPr wrap="square" lIns="0" tIns="0" rIns="0" bIns="0" rtlCol="0" anchor="ctr"/>
+          <a:lstStyle/>
+          <a:p>
+            <a:pPr indent="0" marL="0">
+              <a:buNone/>
+            </a:pPr>
+            <a:r>
+              <a:rPr lang="en-US" sz="1250" dirty="0">
+                <a:solidFill>
+                  <a:srgbClr val="6B7B85"/>
+                </a:solidFill>
+                <a:latin typeface="Calibri" pitchFamily="34" charset="0"/>
+                <a:ea typeface="Calibri" pitchFamily="34" charset="-122"/>
+                <a:cs typeface="Calibri" pitchFamily="34" charset="-120"/>
+              </a:rPr>
+              <a:t>1 750 € la position. Backup mutualisé : les absences sont couvertes, sans capacité réservée.</a:t>
+            </a:r>
+            <a:endParaRPr lang="en-US" sz="1250" dirty="0"/>
+          </a:p>
+        </p:txBody>
+      </p:sp>
+      <p:sp>
+        <p:nvSpPr>
+          <p:cNvPr id="9" name="Shape 7"/>
+          <p:cNvSpPr/>
+          <p:nvPr/>
+        </p:nvSpPr>
+        <p:spPr>
+          <a:xfrm>
+            <a:off x="6217920" y="2194560"/>
+            <a:ext cx="5349240" cy="2148840"/>
+          </a:xfrm>
+          <a:prstGeom prst="roundRect">
+            <a:avLst>
+              <a:gd name="adj" fmla="val 3830"/>
+            </a:avLst>
+          </a:prstGeom>
+          <a:solidFill>
+            <a:srgbClr val="FCE27C"/>
+          </a:solidFill>
+          <a:ln w="12700">
+            <a:solidFill>
+              <a:srgbClr val="FCE27C"/>
+            </a:solidFill>
+            <a:prstDash val="solid"/>
+          </a:ln>
+        </p:spPr>
+      </p:sp>
+      <p:sp>
+        <p:nvSpPr>
+          <p:cNvPr id="10" name="Text 8"/>
+          <p:cNvSpPr/>
+          <p:nvPr/>
+        </p:nvSpPr>
+        <p:spPr>
+          <a:xfrm>
+            <a:off x="6537960" y="2395728"/>
+            <a:ext cx="4709160" cy="274320"/>
+          </a:xfrm>
+          <a:prstGeom prst="rect">
+            <a:avLst/>
+          </a:prstGeom>
+          <a:noFill/>
+          <a:ln/>
+        </p:spPr>
+        <p:txBody>
+          <a:bodyPr wrap="square" lIns="0" tIns="0" rIns="0" bIns="0" rtlCol="0" anchor="ctr"/>
+          <a:lstStyle/>
+          <a:p>
+            <a:pPr indent="0" marL="0">
+              <a:buNone/>
+            </a:pPr>
+            <a:r>
+              <a:rPr lang="en-US" sz="1100" b="1" spc="150" kern="0" dirty="0">
+                <a:solidFill>
+                  <a:srgbClr val="012C42"/>
+                </a:solidFill>
+                <a:latin typeface="Calibri" pitchFamily="34" charset="0"/>
+                <a:ea typeface="Calibri" pitchFamily="34" charset="-122"/>
+                <a:cs typeface="Calibri" pitchFamily="34" charset="-120"/>
+              </a:rPr>
+              <a:t>QUATRE POSITIONS PRIORITY</a:t>
+            </a:r>
+            <a:endParaRPr lang="en-US" sz="1100" dirty="0"/>
+          </a:p>
+        </p:txBody>
+      </p:sp>
+      <p:sp>
+        <p:nvSpPr>
+          <p:cNvPr id="11" name="Text 9"/>
+          <p:cNvSpPr/>
+          <p:nvPr/>
+        </p:nvSpPr>
+        <p:spPr>
+          <a:xfrm>
+            <a:off x="6537960" y="2706624"/>
+            <a:ext cx="4709160" cy="594360"/>
+          </a:xfrm>
+          <a:prstGeom prst="rect">
+            <a:avLst/>
+          </a:prstGeom>
+          <a:noFill/>
+          <a:ln/>
+        </p:spPr>
+        <p:txBody>
+          <a:bodyPr wrap="square" lIns="0" tIns="0" rIns="0" bIns="0" rtlCol="0" anchor="ctr"/>
+          <a:lstStyle/>
+          <a:p>
+            <a:pPr indent="0" marL="0">
+              <a:buNone/>
+            </a:pPr>
+            <a:r>
+              <a:rPr lang="en-US" sz="3000" b="1" dirty="0">
+                <a:solidFill>
+                  <a:srgbClr val="013C58"/>
+                </a:solidFill>
+                <a:latin typeface="Cambria" pitchFamily="34" charset="0"/>
+                <a:ea typeface="Cambria" pitchFamily="34" charset="-122"/>
+                <a:cs typeface="Cambria" pitchFamily="34" charset="-120"/>
+              </a:rPr>
+              <a:t>9 280 € / mois</a:t>
+            </a:r>
+            <a:endParaRPr lang="en-US" sz="3000" dirty="0"/>
+          </a:p>
+        </p:txBody>
+      </p:sp>
+      <p:sp>
+        <p:nvSpPr>
+          <p:cNvPr id="12" name="Text 10"/>
+          <p:cNvSpPr/>
+          <p:nvPr/>
+        </p:nvSpPr>
+        <p:spPr>
+          <a:xfrm>
+            <a:off x="6537960" y="3364992"/>
+            <a:ext cx="4709160" cy="822960"/>
+          </a:xfrm>
+          <a:prstGeom prst="rect">
+            <a:avLst/>
+          </a:prstGeom>
+          <a:noFill/>
+          <a:ln/>
+        </p:spPr>
+        <p:txBody>
+          <a:bodyPr wrap="square" lIns="0" tIns="0" rIns="0" bIns="0" rtlCol="0" anchor="ctr"/>
+          <a:lstStyle/>
+          <a:p>
+            <a:pPr indent="0" marL="0">
+              <a:buNone/>
+            </a:pPr>
+            <a:r>
+              <a:rPr lang="en-US" sz="1250" dirty="0">
+                <a:solidFill>
+                  <a:srgbClr val="012C42"/>
+                </a:solidFill>
+                <a:latin typeface="Calibri" pitchFamily="34" charset="0"/>
+                <a:ea typeface="Calibri" pitchFamily="34" charset="-122"/>
+                <a:cs typeface="Calibri" pitchFamily="34" charset="-120"/>
+              </a:rPr>
+              <a:t>2 320 € la position. Backup permanent réservé, traitement prioritaire, supervision renforcée.</a:t>
+            </a:r>
+            <a:endParaRPr lang="en-US" sz="1250" dirty="0"/>
+          </a:p>
+        </p:txBody>
+      </p:sp>
+      <p:sp>
+        <p:nvSpPr>
+          <p:cNvPr id="13" name="Shape 11"/>
+          <p:cNvSpPr/>
+          <p:nvPr/>
+        </p:nvSpPr>
+        <p:spPr>
+          <a:xfrm>
+            <a:off x="594360" y="4617720"/>
+            <a:ext cx="10972800" cy="1234440"/>
+          </a:xfrm>
+          <a:prstGeom prst="roundRect">
+            <a:avLst>
+              <a:gd name="adj" fmla="val 6667"/>
+            </a:avLst>
+          </a:prstGeom>
+          <a:solidFill>
+            <a:srgbClr val="013C58"/>
+          </a:solidFill>
+          <a:ln w="12700">
+            <a:solidFill>
+              <a:srgbClr val="013C58"/>
+            </a:solidFill>
+            <a:prstDash val="solid"/>
+          </a:ln>
+        </p:spPr>
+      </p:sp>
+      <p:sp>
+        <p:nvSpPr>
+          <p:cNvPr id="14" name="Text 12"/>
+          <p:cNvSpPr/>
+          <p:nvPr/>
+        </p:nvSpPr>
+        <p:spPr>
+          <a:xfrm>
+            <a:off x="1005840" y="4754880"/>
+            <a:ext cx="10149840" cy="411480"/>
+          </a:xfrm>
+          <a:prstGeom prst="rect">
+            <a:avLst/>
+          </a:prstGeom>
+          <a:noFill/>
+          <a:ln/>
+        </p:spPr>
+        <p:txBody>
+          <a:bodyPr wrap="square" lIns="0" tIns="0" rIns="0" bIns="0" rtlCol="0" anchor="ctr"/>
+          <a:lstStyle/>
+          <a:p>
+            <a:pPr indent="0" marL="0">
+              <a:buNone/>
+            </a:pPr>
+            <a:r>
+              <a:rPr lang="en-US" sz="1900" b="1" dirty="0">
+                <a:solidFill>
+                  <a:srgbClr val="FFFFFF"/>
+                </a:solidFill>
+                <a:latin typeface="Cambria" pitchFamily="34" charset="0"/>
+                <a:ea typeface="Cambria" pitchFamily="34" charset="-122"/>
+                <a:cs typeface="Cambria" pitchFamily="34" charset="-120"/>
+              </a:rPr>
+              <a:t>À garantie égale, quatre positions Priority valent six positions dédiées.</a:t>
+            </a:r>
+            <a:endParaRPr lang="en-US" sz="1900" dirty="0"/>
+          </a:p>
+        </p:txBody>
+      </p:sp>
+      <p:sp>
+        <p:nvSpPr>
+          <p:cNvPr id="15" name="Text 13"/>
+          <p:cNvSpPr/>
+          <p:nvPr/>
+        </p:nvSpPr>
+        <p:spPr>
+          <a:xfrm>
+            <a:off x="1005840" y="5193792"/>
+            <a:ext cx="10149840" cy="502920"/>
+          </a:xfrm>
+          <a:prstGeom prst="rect">
+            <a:avLst/>
+          </a:prstGeom>
+          <a:noFill/>
+          <a:ln/>
+        </p:spPr>
+        <p:txBody>
+          <a:bodyPr wrap="square" lIns="0" tIns="0" rIns="0" bIns="0" rtlCol="0" anchor="ctr"/>
+          <a:lstStyle/>
+          <a:p>
+            <a:pPr indent="0" marL="0">
+              <a:buNone/>
+            </a:pPr>
+            <a:r>
+              <a:rPr lang="en-US" sz="1300" dirty="0">
+                <a:solidFill>
+                  <a:srgbClr val="C6D6DE"/>
+                </a:solidFill>
+                <a:latin typeface="Calibri" pitchFamily="34" charset="0"/>
+                <a:ea typeface="Calibri" pitchFamily="34" charset="-122"/>
+                <a:cs typeface="Calibri" pitchFamily="34" charset="-120"/>
+              </a:rPr>
+              <a:t>Six dédiées au meilleur palier, c'est 9 300 € — pour le même budget, vous pilotez quatre interlocuteurs au lieu de six.</a:t>
+            </a:r>
+            <a:endParaRPr lang="en-US" sz="1300" dirty="0"/>
+          </a:p>
+        </p:txBody>
+      </p:sp>
+      <p:sp>
+        <p:nvSpPr>
+          <p:cNvPr id="16" name="Text 14"/>
+          <p:cNvSpPr/>
+          <p:nvPr/>
+        </p:nvSpPr>
+        <p:spPr>
+          <a:xfrm>
+            <a:off x="594360" y="6327648"/>
+            <a:ext cx="9966960" cy="274320"/>
+          </a:xfrm>
+          <a:prstGeom prst="rect">
+            <a:avLst/>
+          </a:prstGeom>
+          <a:noFill/>
+          <a:ln/>
+        </p:spPr>
+        <p:txBody>
+          <a:bodyPr wrap="square" lIns="0" tIns="0" rIns="0" bIns="0" rtlCol="0" anchor="ctr"/>
+          <a:lstStyle/>
+          <a:p>
+            <a:pPr indent="0" marL="0">
+              <a:buNone/>
+            </a:pPr>
+            <a:r>
+              <a:rPr lang="en-US" sz="1000" dirty="0">
+                <a:solidFill>
+                  <a:srgbClr val="6B7B85"/>
+                </a:solidFill>
+                <a:latin typeface="Calibri" pitchFamily="34" charset="0"/>
+                <a:ea typeface="Calibri" pitchFamily="34" charset="-122"/>
+                <a:cs typeface="Calibri" pitchFamily="34" charset="-120"/>
+              </a:rPr>
+              <a:t>Priority se chiffre aussi à 1, 2, 3 ou 5 positions — multiplicateur dégressif avec le volume.</a:t>
+            </a:r>
+            <a:endParaRPr lang="en-US" sz="1000" dirty="0"/>
+          </a:p>
+        </p:txBody>
+      </p:sp>
+      <p:sp>
+        <p:nvSpPr>
+          <p:cNvPr id="17" name="Text 15"/>
+          <p:cNvSpPr/>
+          <p:nvPr/>
+        </p:nvSpPr>
+        <p:spPr>
+          <a:xfrm>
+            <a:off x="11018520" y="6327648"/>
+            <a:ext cx="548640" cy="274320"/>
+          </a:xfrm>
+          <a:prstGeom prst="rect">
+            <a:avLst/>
+          </a:prstGeom>
+          <a:noFill/>
+          <a:ln/>
+        </p:spPr>
+        <p:txBody>
+          <a:bodyPr wrap="square" lIns="0" tIns="0" rIns="0" bIns="0" rtlCol="0" anchor="ctr"/>
+          <a:lstStyle/>
+          <a:p>
+            <a:pPr algn="r" indent="0" marL="0">
+              <a:buNone/>
+            </a:pPr>
+            <a:r>
+              <a:rPr lang="en-US" sz="1000" dirty="0">
+                <a:solidFill>
+                  <a:srgbClr val="6B7B85"/>
+                </a:solidFill>
+                <a:latin typeface="Calibri" pitchFamily="34" charset="0"/>
+                <a:ea typeface="Calibri" pitchFamily="34" charset="-122"/>
+                <a:cs typeface="Calibri" pitchFamily="34" charset="-120"/>
+              </a:rPr>
+              <a:t>14</a:t>
+            </a:r>
+            <a:endParaRPr lang="en-US" sz="1000" dirty="0"/>
+          </a:p>
+        </p:txBody>
+      </p:sp>
+    </p:spTree>
+  </p:cSld>
+  <p:clrMapOvr>
+    <a:masterClrMapping/>
+  </p:clrMapOvr>
+</p:sld>
+</file>
+
+<file path=ppt/slides/slide15.xml><?xml version="1.0" encoding="utf-8"?>
+<p:sld xmlns:a="http://schemas.openxmlformats.org/drawingml/2006/main" xmlns:r="http://schemas.openxmlformats.org/officeDocument/2006/relationships" xmlns:p="http://schemas.openxmlformats.org/presentationml/2006/main">
+  <p:cSld name="Slide 15">
+    <p:bg>
+      <p:bgPr>
+        <a:solidFill>
+          <a:srgbClr val="FFFFFF"/>
+        </a:solidFill>
+      </p:bgPr>
+    </p:bg>
+    <p:spTree>
+      <p:nvGrpSpPr>
+        <p:cNvPr id="1" name=""/>
+        <p:cNvGrpSpPr/>
+        <p:nvPr/>
+      </p:nvGrpSpPr>
+      <p:grpSpPr>
+        <a:xfrm>
+          <a:off x="0" y="0"/>
+          <a:ext cx="0" cy="0"/>
+          <a:chOff x="0" y="0"/>
+          <a:chExt cx="0" cy="0"/>
+        </a:xfrm>
+      </p:grpSpPr>
+      <p:sp>
+        <p:nvSpPr>
+          <p:cNvPr id="2" name="Text 0"/>
+          <p:cNvSpPr/>
+          <p:nvPr/>
+        </p:nvSpPr>
+        <p:spPr>
+          <a:xfrm>
+            <a:off x="594360" y="384048"/>
+            <a:ext cx="10972800" cy="237744"/>
+          </a:xfrm>
+          <a:prstGeom prst="rect">
+            <a:avLst/>
+          </a:prstGeom>
+          <a:noFill/>
+          <a:ln/>
+        </p:spPr>
+        <p:txBody>
+          <a:bodyPr wrap="square" lIns="0" tIns="0" rIns="0" bIns="0" rtlCol="0" anchor="ctr"/>
+          <a:lstStyle/>
+          <a:p>
+            <a:pPr indent="0" marL="0">
+              <a:buNone/>
+            </a:pPr>
+            <a:r>
+              <a:rPr lang="en-US" sz="1100" b="1" spc="220" kern="0" dirty="0">
+                <a:solidFill>
+                  <a:srgbClr val="6B7B85"/>
+                </a:solidFill>
+                <a:latin typeface="Calibri" pitchFamily="34" charset="0"/>
+                <a:ea typeface="Calibri" pitchFamily="34" charset="-122"/>
+                <a:cs typeface="Calibri" pitchFamily="34" charset="-120"/>
+              </a:rPr>
+              <a:t>ANNEXE — HORS PÉRIMÈTRE STANDARD</a:t>
+            </a:r>
+            <a:endParaRPr lang="en-US" sz="1100" dirty="0"/>
+          </a:p>
+        </p:txBody>
+      </p:sp>
+      <p:sp>
+        <p:nvSpPr>
+          <p:cNvPr id="3" name="Text 1"/>
+          <p:cNvSpPr/>
+          <p:nvPr/>
+        </p:nvSpPr>
+        <p:spPr>
+          <a:xfrm>
+            <a:off x="594360" y="658368"/>
+            <a:ext cx="10972800" cy="822960"/>
+          </a:xfrm>
+          <a:prstGeom prst="rect">
+            <a:avLst/>
+          </a:prstGeom>
+          <a:noFill/>
+          <a:ln/>
+        </p:spPr>
+        <p:txBody>
+          <a:bodyPr wrap="square" lIns="0" tIns="0" rIns="0" bIns="0" rtlCol="0" anchor="t"/>
+          <a:lstStyle/>
+          <a:p>
+            <a:pPr indent="0" marL="0">
+              <a:buNone/>
+            </a:pPr>
+            <a:r>
+              <a:rPr lang="en-US" sz="3400" b="1" dirty="0">
+                <a:solidFill>
+                  <a:srgbClr val="013C58"/>
+                </a:solidFill>
+                <a:latin typeface="Cambria" pitchFamily="34" charset="0"/>
+                <a:ea typeface="Cambria" pitchFamily="34" charset="-122"/>
+                <a:cs typeface="Cambria" pitchFamily="34" charset="-120"/>
+              </a:rPr>
+              <a:t>Étendre l'amplitude, créneau par créneau</a:t>
+            </a:r>
+            <a:endParaRPr lang="en-US" sz="3400" dirty="0"/>
+          </a:p>
+        </p:txBody>
+      </p:sp>
+      <p:sp>
+        <p:nvSpPr>
+          <p:cNvPr id="4" name="Text 2"/>
+          <p:cNvSpPr/>
+          <p:nvPr/>
+        </p:nvSpPr>
+        <p:spPr>
+          <a:xfrm>
+            <a:off x="594360" y="1572768"/>
+            <a:ext cx="10972800" cy="384048"/>
+          </a:xfrm>
+          <a:prstGeom prst="rect">
+            <a:avLst/>
+          </a:prstGeom>
+          <a:noFill/>
+          <a:ln/>
+        </p:spPr>
+        <p:txBody>
+          <a:bodyPr wrap="square" lIns="0" tIns="0" rIns="0" bIns="0" rtlCol="0" anchor="ctr"/>
+          <a:lstStyle/>
+          <a:p>
+            <a:pPr indent="0" marL="0">
+              <a:buNone/>
+            </a:pPr>
+            <a:r>
+              <a:rPr lang="en-US" sz="1350" dirty="0">
+                <a:solidFill>
+                  <a:srgbClr val="6B7B85"/>
+                </a:solidFill>
+                <a:latin typeface="Calibri" pitchFamily="34" charset="0"/>
+                <a:ea typeface="Calibri" pitchFamily="34" charset="-122"/>
+                <a:cs typeface="Calibri" pitchFamily="34" charset="-120"/>
+              </a:rPr>
+              <a:t>Vous n'avez pas besoin de quatre techniciens à 7h du matin : vous en avez besoin d'un. L'amplitude se vend par créneau couvert, pas par position.</a:t>
+            </a:r>
+            <a:endParaRPr lang="en-US" sz="1350" dirty="0"/>
+          </a:p>
+        </p:txBody>
+      </p:sp>
+      <p:graphicFrame>
+        <p:nvGraphicFramePr>
+          <p:cNvPr id="16" name="Table 0"/>
+          <p:cNvGraphicFramePr>
+            <a:graphicFrameLocks noGrp="1"/>
+          </p:cNvGraphicFramePr>
+          <p:nvPr>
+            <p:extLst>
+              <p:ext uri="{D42A27DB-BD31-4B8C-83A1-F6EECF244321}">
+                <p14:modId xmlns:p14="http://schemas.microsoft.com/office/powerpoint/2010/main" val="1579011935"/>
+              </p:ext>
+            </p:extLst>
+          </p:nvPr>
+        </p:nvGraphicFramePr>
+        <p:xfrm>
+          <a:off x="594360" y="2121408"/>
+          <a:ext cx="10972800" cy="914400"/>
+        </p:xfrm>
+        <a:graphic>
+          <a:graphicData uri="http://schemas.openxmlformats.org/drawingml/2006/table">
+            <a:tbl>
+              <a:tblPr/>
+              <a:tblGrid>
+                <a:gridCol w="4846320"/>
+                <a:gridCol w="3657600"/>
+                <a:gridCol w="2468880"/>
+              </a:tblGrid>
+              <a:tr h="411480">
+                <a:tc>
+                  <a:txBody>
+                    <a:bodyPr/>
+                    <a:lstStyle/>
+                    <a:p>
+                      <a:pPr algn="l" indent="0" marL="0">
+                        <a:buNone/>
+                      </a:pPr>
+                      <a:r>
+                        <a:rPr lang="en-US" sz="1200" b="1" dirty="0">
+                          <a:solidFill>
+                            <a:srgbClr val="FFFFFF"/>
+                          </a:solidFill>
+                          <a:latin typeface="Calibri" pitchFamily="34" charset="0"/>
+                          <a:ea typeface="Calibri" pitchFamily="34" charset="-122"/>
+                          <a:cs typeface="Calibri" pitchFamily="34" charset="-120"/>
+                        </a:rPr>
+                        <a:t>Créneau ajouté (une position présente)</a:t>
+                      </a:r>
+                      <a:endParaRPr lang="en-US" sz="1200" dirty="0">
+                        <a:latin typeface="Calibri" charset="0"/>
+                        <a:ea typeface="Calibri" charset="0"/>
+                        <a:cs typeface="Calibri" charset="0"/>
+                      </a:endParaRPr>
+                    </a:p>
+                  </a:txBody>
+                  <a:tcPr marL="91440" marR="91440" marT="45720" marB="45720" anchor="ctr">
+                    <a:lnL w="12700" cap="flat" cmpd="sng" algn="ctr">
+                      <a:solidFill>
+                        <a:srgbClr val="D8E1E6"/>
+                      </a:solidFill>
+                      <a:prstDash val="solid"/>
+                      <a:round/>
+                      <a:headEnd type="none" w="med" len="med"/>
+                      <a:tailEnd type="none" w="med" len="med"/>
+                    </a:lnL>
+                    <a:lnR w="12700" cap="flat" cmpd="sng" algn="ctr">
+                      <a:solidFill>
+                        <a:srgbClr val="D8E1E6"/>
+                      </a:solidFill>
+                      <a:prstDash val="solid"/>
+                      <a:round/>
+                      <a:headEnd type="none" w="med" len="med"/>
+                      <a:tailEnd type="none" w="med" len="med"/>
+                    </a:lnR>
+                    <a:lnT w="12700" cap="flat" cmpd="sng" algn="ctr">
+                      <a:solidFill>
+                        <a:srgbClr val="D8E1E6"/>
+                      </a:solidFill>
+                      <a:prstDash val="solid"/>
+                      <a:round/>
+                      <a:headEnd type="none" w="med" len="med"/>
+                      <a:tailEnd type="none" w="med" len="med"/>
+                    </a:lnT>
+                    <a:lnB w="12700" cap="flat" cmpd="sng" algn="ctr">
+                      <a:solidFill>
+                        <a:srgbClr val="D8E1E6"/>
+                      </a:solidFill>
+                      <a:prstDash val="solid"/>
+                      <a:round/>
+                      <a:headEnd type="none" w="med" len="med"/>
+                      <a:tailEnd type="none" w="med" len="med"/>
+                    </a:lnB>
+                    <a:solidFill>
+                      <a:srgbClr val="013C58"/>
+                    </a:solidFill>
+                  </a:tcPr>
+                </a:tc>
+                <a:tc>
+                  <a:txBody>
+                    <a:bodyPr/>
+                    <a:lstStyle/>
+                    <a:p>
+                      <a:pPr algn="l" indent="0" marL="0">
+                        <a:buNone/>
+                      </a:pPr>
+                      <a:r>
+                        <a:rPr lang="en-US" sz="1200" b="1" dirty="0">
+                          <a:solidFill>
+                            <a:srgbClr val="FFFFFF"/>
+                          </a:solidFill>
+                          <a:latin typeface="Calibri" pitchFamily="34" charset="0"/>
+                          <a:ea typeface="Calibri" pitchFamily="34" charset="-122"/>
+                          <a:cs typeface="Calibri" pitchFamily="34" charset="-120"/>
+                        </a:rPr>
+                        <a:t>Quand, chez vous</a:t>
+                      </a:r>
+                      <a:endParaRPr lang="en-US" sz="1200" dirty="0">
+                        <a:latin typeface="Calibri" charset="0"/>
+                        <a:ea typeface="Calibri" charset="0"/>
+                        <a:cs typeface="Calibri" charset="0"/>
+                      </a:endParaRPr>
+                    </a:p>
+                  </a:txBody>
+                  <a:tcPr marL="91440" marR="91440" marT="45720" marB="45720" anchor="ctr">
+                    <a:lnL w="12700" cap="flat" cmpd="sng" algn="ctr">
+                      <a:solidFill>
+                        <a:srgbClr val="D8E1E6"/>
+                      </a:solidFill>
+                      <a:prstDash val="solid"/>
+                      <a:round/>
+                      <a:headEnd type="none" w="med" len="med"/>
+                      <a:tailEnd type="none" w="med" len="med"/>
+                    </a:lnL>
+                    <a:lnR w="12700" cap="flat" cmpd="sng" algn="ctr">
+                      <a:solidFill>
+                        <a:srgbClr val="D8E1E6"/>
+                      </a:solidFill>
+                      <a:prstDash val="solid"/>
+                      <a:round/>
+                      <a:headEnd type="none" w="med" len="med"/>
+                      <a:tailEnd type="none" w="med" len="med"/>
+                    </a:lnR>
+                    <a:lnT w="12700" cap="flat" cmpd="sng" algn="ctr">
+                      <a:solidFill>
+                        <a:srgbClr val="D8E1E6"/>
+                      </a:solidFill>
+                      <a:prstDash val="solid"/>
+                      <a:round/>
+                      <a:headEnd type="none" w="med" len="med"/>
+                      <a:tailEnd type="none" w="med" len="med"/>
+                    </a:lnT>
+                    <a:lnB w="12700" cap="flat" cmpd="sng" algn="ctr">
+                      <a:solidFill>
+                        <a:srgbClr val="D8E1E6"/>
+                      </a:solidFill>
+                      <a:prstDash val="solid"/>
+                      <a:round/>
+                      <a:headEnd type="none" w="med" len="med"/>
+                      <a:tailEnd type="none" w="med" len="med"/>
+                    </a:lnB>
+                    <a:solidFill>
+                      <a:srgbClr val="013C58"/>
+                    </a:solidFill>
+                  </a:tcPr>
+                </a:tc>
+                <a:tc>
+                  <a:txBody>
+                    <a:bodyPr/>
+                    <a:lstStyle/>
+                    <a:p>
+                      <a:pPr algn="r" indent="0" marL="0">
+                        <a:buNone/>
+                      </a:pPr>
+                      <a:r>
+                        <a:rPr lang="en-US" sz="1200" b="1" dirty="0">
+                          <a:solidFill>
+                            <a:srgbClr val="FFFFFF"/>
+                          </a:solidFill>
+                          <a:latin typeface="Calibri" pitchFamily="34" charset="0"/>
+                          <a:ea typeface="Calibri" pitchFamily="34" charset="-122"/>
+                          <a:cs typeface="Calibri" pitchFamily="34" charset="-120"/>
+                        </a:rPr>
+                        <a:t>Prix mensuel</a:t>
+                      </a:r>
+                      <a:endParaRPr lang="en-US" sz="1200" dirty="0">
+                        <a:latin typeface="Calibri" charset="0"/>
+                        <a:ea typeface="Calibri" charset="0"/>
+                        <a:cs typeface="Calibri" charset="0"/>
+                      </a:endParaRPr>
+                    </a:p>
+                  </a:txBody>
+                  <a:tcPr marL="91440" marR="91440" marT="45720" marB="45720" anchor="ctr">
+                    <a:lnL w="12700" cap="flat" cmpd="sng" algn="ctr">
+                      <a:solidFill>
+                        <a:srgbClr val="D8E1E6"/>
+                      </a:solidFill>
+                      <a:prstDash val="solid"/>
+                      <a:round/>
+                      <a:headEnd type="none" w="med" len="med"/>
+                      <a:tailEnd type="none" w="med" len="med"/>
+                    </a:lnL>
+                    <a:lnR w="12700" cap="flat" cmpd="sng" algn="ctr">
+                      <a:solidFill>
+                        <a:srgbClr val="D8E1E6"/>
+                      </a:solidFill>
+                      <a:prstDash val="solid"/>
+                      <a:round/>
+                      <a:headEnd type="none" w="med" len="med"/>
+                      <a:tailEnd type="none" w="med" len="med"/>
+                    </a:lnR>
+                    <a:lnT w="12700" cap="flat" cmpd="sng" algn="ctr">
+                      <a:solidFill>
+                        <a:srgbClr val="D8E1E6"/>
+                      </a:solidFill>
+                      <a:prstDash val="solid"/>
+                      <a:round/>
+                      <a:headEnd type="none" w="med" len="med"/>
+                      <a:tailEnd type="none" w="med" len="med"/>
+                    </a:lnT>
+                    <a:lnB w="12700" cap="flat" cmpd="sng" algn="ctr">
+                      <a:solidFill>
+                        <a:srgbClr val="D8E1E6"/>
+                      </a:solidFill>
+                      <a:prstDash val="solid"/>
+                      <a:round/>
+                      <a:headEnd type="none" w="med" len="med"/>
+                      <a:tailEnd type="none" w="med" len="med"/>
+                    </a:lnB>
+                    <a:solidFill>
+                      <a:srgbClr val="013C58"/>
+                    </a:solidFill>
+                  </a:tcPr>
+                </a:tc>
+              </a:tr>
+              <a:tr h="411480">
+                <a:tc>
+                  <a:txBody>
+                    <a:bodyPr/>
+                    <a:lstStyle/>
+                    <a:p>
+                      <a:pPr algn="l" indent="0" marL="0">
+                        <a:buNone/>
+                      </a:pPr>
+                      <a:r>
+                        <a:rPr lang="en-US" sz="1350" b="1" dirty="0">
+                          <a:solidFill>
+                            <a:srgbClr val="013C58"/>
+                          </a:solidFill>
+                          <a:latin typeface="Calibri" pitchFamily="34" charset="0"/>
+                          <a:ea typeface="Calibri" pitchFamily="34" charset="-122"/>
+                          <a:cs typeface="Calibri" pitchFamily="34" charset="-120"/>
+                        </a:rPr>
+                        <a:t>Matin 7h – 9h, du lundi au vendredi</a:t>
+                      </a:r>
+                      <a:endParaRPr lang="en-US" sz="1350" dirty="0">
+                        <a:latin typeface="Calibri" charset="0"/>
+                        <a:ea typeface="Calibri" charset="0"/>
+                        <a:cs typeface="Calibri" charset="0"/>
+                      </a:endParaRPr>
+                    </a:p>
+                  </a:txBody>
+                  <a:tcPr marL="91440" marR="91440" marT="45720" marB="45720" anchor="ctr">
+                    <a:lnL w="12700" cap="flat" cmpd="sng" algn="ctr">
+                      <a:solidFill>
+                        <a:srgbClr val="D8E1E6"/>
+                      </a:solidFill>
+                      <a:prstDash val="solid"/>
+                      <a:round/>
+                      <a:headEnd type="none" w="med" len="med"/>
+                      <a:tailEnd type="none" w="med" len="med"/>
+                    </a:lnL>
+                    <a:lnR w="12700" cap="flat" cmpd="sng" algn="ctr">
+                      <a:solidFill>
+                        <a:srgbClr val="D8E1E6"/>
+                      </a:solidFill>
+                      <a:prstDash val="solid"/>
+                      <a:round/>
+                      <a:headEnd type="none" w="med" len="med"/>
+                      <a:tailEnd type="none" w="med" len="med"/>
+                    </a:lnR>
+                    <a:lnT w="12700" cap="flat" cmpd="sng" algn="ctr">
+                      <a:solidFill>
+                        <a:srgbClr val="D8E1E6"/>
+                      </a:solidFill>
+                      <a:prstDash val="solid"/>
+                      <a:round/>
+                      <a:headEnd type="none" w="med" len="med"/>
+                      <a:tailEnd type="none" w="med" len="med"/>
+                    </a:lnT>
+                    <a:lnB w="12700" cap="flat" cmpd="sng" algn="ctr">
+                      <a:solidFill>
+                        <a:srgbClr val="D8E1E6"/>
+                      </a:solidFill>
+                      <a:prstDash val="solid"/>
+                      <a:round/>
+                      <a:headEnd type="none" w="med" len="med"/>
+                      <a:tailEnd type="none" w="med" len="med"/>
+                    </a:lnB>
+                    <a:solidFill>
+                      <a:srgbClr val="FCE27C"/>
+                    </a:solidFill>
+                  </a:tcPr>
+                </a:tc>
+                <a:tc>
+                  <a:txBody>
+                    <a:bodyPr/>
+                    <a:lstStyle/>
+                    <a:p>
+                      <a:pPr algn="l" indent="0" marL="0">
+                        <a:buNone/>
+                      </a:pPr>
+                      <a:r>
+                        <a:rPr lang="en-US" sz="1350" b="1" dirty="0">
+                          <a:solidFill>
+                            <a:srgbClr val="013C58"/>
+                          </a:solidFill>
+                          <a:latin typeface="Calibri" pitchFamily="34" charset="0"/>
+                          <a:ea typeface="Calibri" pitchFamily="34" charset="-122"/>
+                          <a:cs typeface="Calibri" pitchFamily="34" charset="-120"/>
+                        </a:rPr>
+                        <a:t>Avant l'arrivée de vos équipes</a:t>
+                      </a:r>
+                      <a:endParaRPr lang="en-US" sz="1350" dirty="0">
+                        <a:latin typeface="Calibri" charset="0"/>
+                        <a:ea typeface="Calibri" charset="0"/>
+                        <a:cs typeface="Calibri" charset="0"/>
+                      </a:endParaRPr>
+                    </a:p>
+                  </a:txBody>
+                  <a:tcPr marL="91440" marR="91440" marT="45720" marB="45720" anchor="ctr">
+                    <a:lnL w="12700" cap="flat" cmpd="sng" algn="ctr">
+                      <a:solidFill>
+                        <a:srgbClr val="D8E1E6"/>
+                      </a:solidFill>
+                      <a:prstDash val="solid"/>
+                      <a:round/>
+                      <a:headEnd type="none" w="med" len="med"/>
+                      <a:tailEnd type="none" w="med" len="med"/>
+                    </a:lnL>
+                    <a:lnR w="12700" cap="flat" cmpd="sng" algn="ctr">
+                      <a:solidFill>
+                        <a:srgbClr val="D8E1E6"/>
+                      </a:solidFill>
+                      <a:prstDash val="solid"/>
+                      <a:round/>
+                      <a:headEnd type="none" w="med" len="med"/>
+                      <a:tailEnd type="none" w="med" len="med"/>
+                    </a:lnR>
+                    <a:lnT w="12700" cap="flat" cmpd="sng" algn="ctr">
+                      <a:solidFill>
+                        <a:srgbClr val="D8E1E6"/>
+                      </a:solidFill>
+                      <a:prstDash val="solid"/>
+                      <a:round/>
+                      <a:headEnd type="none" w="med" len="med"/>
+                      <a:tailEnd type="none" w="med" len="med"/>
+                    </a:lnT>
+                    <a:lnB w="12700" cap="flat" cmpd="sng" algn="ctr">
+                      <a:solidFill>
+                        <a:srgbClr val="D8E1E6"/>
+                      </a:solidFill>
+                      <a:prstDash val="solid"/>
+                      <a:round/>
+                      <a:headEnd type="none" w="med" len="med"/>
+                      <a:tailEnd type="none" w="med" len="med"/>
+                    </a:lnB>
+                    <a:solidFill>
+                      <a:srgbClr val="FCE27C"/>
+                    </a:solidFill>
+                  </a:tcPr>
+                </a:tc>
+                <a:tc>
+                  <a:txBody>
+                    <a:bodyPr/>
+                    <a:lstStyle/>
+                    <a:p>
+                      <a:pPr algn="r" indent="0" marL="0">
+                        <a:buNone/>
+                      </a:pPr>
+                      <a:r>
+                        <a:rPr lang="en-US" sz="1350" b="1" dirty="0">
+                          <a:solidFill>
+                            <a:srgbClr val="013C58"/>
+                          </a:solidFill>
+                          <a:latin typeface="Calibri" pitchFamily="34" charset="0"/>
+                          <a:ea typeface="Calibri" pitchFamily="34" charset="-122"/>
+                          <a:cs typeface="Calibri" pitchFamily="34" charset="-120"/>
+                        </a:rPr>
+                        <a:t>550 €</a:t>
+                      </a:r>
+                      <a:endParaRPr lang="en-US" sz="1350" dirty="0">
+                        <a:latin typeface="Calibri" charset="0"/>
+                        <a:ea typeface="Calibri" charset="0"/>
+                        <a:cs typeface="Calibri" charset="0"/>
+                      </a:endParaRPr>
+                    </a:p>
+                  </a:txBody>
+                  <a:tcPr marL="91440" marR="91440" marT="45720" marB="45720" anchor="ctr">
+                    <a:lnL w="12700" cap="flat" cmpd="sng" algn="ctr">
+                      <a:solidFill>
+                        <a:srgbClr val="D8E1E6"/>
+                      </a:solidFill>
+                      <a:prstDash val="solid"/>
+                      <a:round/>
+                      <a:headEnd type="none" w="med" len="med"/>
+                      <a:tailEnd type="none" w="med" len="med"/>
+                    </a:lnL>
+                    <a:lnR w="12700" cap="flat" cmpd="sng" algn="ctr">
+                      <a:solidFill>
+                        <a:srgbClr val="D8E1E6"/>
+                      </a:solidFill>
+                      <a:prstDash val="solid"/>
+                      <a:round/>
+                      <a:headEnd type="none" w="med" len="med"/>
+                      <a:tailEnd type="none" w="med" len="med"/>
+                    </a:lnR>
+                    <a:lnT w="12700" cap="flat" cmpd="sng" algn="ctr">
+                      <a:solidFill>
+                        <a:srgbClr val="D8E1E6"/>
+                      </a:solidFill>
+                      <a:prstDash val="solid"/>
+                      <a:round/>
+                      <a:headEnd type="none" w="med" len="med"/>
+                      <a:tailEnd type="none" w="med" len="med"/>
+                    </a:lnT>
+                    <a:lnB w="12700" cap="flat" cmpd="sng" algn="ctr">
+                      <a:solidFill>
+                        <a:srgbClr val="D8E1E6"/>
+                      </a:solidFill>
+                      <a:prstDash val="solid"/>
+                      <a:round/>
+                      <a:headEnd type="none" w="med" len="med"/>
+                      <a:tailEnd type="none" w="med" len="med"/>
+                    </a:lnB>
+                    <a:solidFill>
+                      <a:srgbClr val="FCE27C"/>
+                    </a:solidFill>
+                  </a:tcPr>
+                </a:tc>
+              </a:tr>
+              <a:tr h="411480">
+                <a:tc>
+                  <a:txBody>
+                    <a:bodyPr/>
+                    <a:lstStyle/>
+                    <a:p>
+                      <a:pPr algn="l" indent="0" marL="0">
+                        <a:buNone/>
+                      </a:pPr>
+                      <a:r>
+                        <a:rPr lang="en-US" sz="1350" dirty="0">
+                          <a:solidFill>
+                            <a:srgbClr val="1A2B34"/>
+                          </a:solidFill>
+                          <a:latin typeface="Calibri" pitchFamily="34" charset="0"/>
+                          <a:ea typeface="Calibri" pitchFamily="34" charset="-122"/>
+                          <a:cs typeface="Calibri" pitchFamily="34" charset="-120"/>
+                        </a:rPr>
+                        <a:t>Soirée 18h – 20h, du lundi au vendredi</a:t>
+                      </a:r>
+                      <a:endParaRPr lang="en-US" sz="1350" dirty="0">
+                        <a:latin typeface="Calibri" charset="0"/>
+                        <a:ea typeface="Calibri" charset="0"/>
+                        <a:cs typeface="Calibri" charset="0"/>
+                      </a:endParaRPr>
+                    </a:p>
+                  </a:txBody>
+                  <a:tcPr marL="91440" marR="91440" marT="45720" marB="45720" anchor="ctr">
+                    <a:lnL w="12700" cap="flat" cmpd="sng" algn="ctr">
+                      <a:solidFill>
+                        <a:srgbClr val="D8E1E6"/>
+                      </a:solidFill>
+                      <a:prstDash val="solid"/>
+                      <a:round/>
+                      <a:headEnd type="none" w="med" len="med"/>
+                      <a:tailEnd type="none" w="med" len="med"/>
+                    </a:lnL>
+                    <a:lnR w="12700" cap="flat" cmpd="sng" algn="ctr">
+                      <a:solidFill>
+                        <a:srgbClr val="D8E1E6"/>
+                      </a:solidFill>
+                      <a:prstDash val="solid"/>
+                      <a:round/>
+                      <a:headEnd type="none" w="med" len="med"/>
+                      <a:tailEnd type="none" w="med" len="med"/>
+                    </a:lnR>
+                    <a:lnT w="12700" cap="flat" cmpd="sng" algn="ctr">
+                      <a:solidFill>
+                        <a:srgbClr val="D8E1E6"/>
+                      </a:solidFill>
+                      <a:prstDash val="solid"/>
+                      <a:round/>
+                      <a:headEnd type="none" w="med" len="med"/>
+                      <a:tailEnd type="none" w="med" len="med"/>
+                    </a:lnT>
+                    <a:lnB w="12700" cap="flat" cmpd="sng" algn="ctr">
+                      <a:solidFill>
+                        <a:srgbClr val="D8E1E6"/>
+                      </a:solidFill>
+                      <a:prstDash val="solid"/>
+                      <a:round/>
+                      <a:headEnd type="none" w="med" len="med"/>
+                      <a:tailEnd type="none" w="med" len="med"/>
+                    </a:lnB>
+                    <a:solidFill>
+                      <a:srgbClr val="FFFFFF"/>
+                    </a:solidFill>
+                  </a:tcPr>
+                </a:tc>
+                <a:tc>
+                  <a:txBody>
+                    <a:bodyPr/>
+                    <a:lstStyle/>
+                    <a:p>
+                      <a:pPr algn="l" indent="0" marL="0">
+                        <a:buNone/>
+                      </a:pPr>
+                      <a:r>
+                        <a:rPr lang="en-US" sz="1350" dirty="0">
+                          <a:solidFill>
+                            <a:srgbClr val="1A2B34"/>
+                          </a:solidFill>
+                          <a:latin typeface="Calibri" pitchFamily="34" charset="0"/>
+                          <a:ea typeface="Calibri" pitchFamily="34" charset="-122"/>
+                          <a:cs typeface="Calibri" pitchFamily="34" charset="-120"/>
+                        </a:rPr>
+                        <a:t>Après le départ de vos équipes</a:t>
+                      </a:r>
+                      <a:endParaRPr lang="en-US" sz="1350" dirty="0">
+                        <a:latin typeface="Calibri" charset="0"/>
+                        <a:ea typeface="Calibri" charset="0"/>
+                        <a:cs typeface="Calibri" charset="0"/>
+                      </a:endParaRPr>
+                    </a:p>
+                  </a:txBody>
+                  <a:tcPr marL="91440" marR="91440" marT="45720" marB="45720" anchor="ctr">
+                    <a:lnL w="12700" cap="flat" cmpd="sng" algn="ctr">
+                      <a:solidFill>
+                        <a:srgbClr val="D8E1E6"/>
+                      </a:solidFill>
+                      <a:prstDash val="solid"/>
+                      <a:round/>
+                      <a:headEnd type="none" w="med" len="med"/>
+                      <a:tailEnd type="none" w="med" len="med"/>
+                    </a:lnL>
+                    <a:lnR w="12700" cap="flat" cmpd="sng" algn="ctr">
+                      <a:solidFill>
+                        <a:srgbClr val="D8E1E6"/>
+                      </a:solidFill>
+                      <a:prstDash val="solid"/>
+                      <a:round/>
+                      <a:headEnd type="none" w="med" len="med"/>
+                      <a:tailEnd type="none" w="med" len="med"/>
+                    </a:lnR>
+                    <a:lnT w="12700" cap="flat" cmpd="sng" algn="ctr">
+                      <a:solidFill>
+                        <a:srgbClr val="D8E1E6"/>
+                      </a:solidFill>
+                      <a:prstDash val="solid"/>
+                      <a:round/>
+                      <a:headEnd type="none" w="med" len="med"/>
+                      <a:tailEnd type="none" w="med" len="med"/>
+                    </a:lnT>
+                    <a:lnB w="12700" cap="flat" cmpd="sng" algn="ctr">
+                      <a:solidFill>
+                        <a:srgbClr val="D8E1E6"/>
+                      </a:solidFill>
+                      <a:prstDash val="solid"/>
+                      <a:round/>
+                      <a:headEnd type="none" w="med" len="med"/>
+                      <a:tailEnd type="none" w="med" len="med"/>
+                    </a:lnB>
+                    <a:solidFill>
+                      <a:srgbClr val="FFFFFF"/>
+                    </a:solidFill>
+                  </a:tcPr>
+                </a:tc>
+                <a:tc>
+                  <a:txBody>
+                    <a:bodyPr/>
+                    <a:lstStyle/>
+                    <a:p>
+                      <a:pPr algn="r" indent="0" marL="0">
+                        <a:buNone/>
+                      </a:pPr>
+                      <a:r>
+                        <a:rPr lang="en-US" sz="1350" dirty="0">
+                          <a:solidFill>
+                            <a:srgbClr val="1A2B34"/>
+                          </a:solidFill>
+                          <a:latin typeface="Calibri" pitchFamily="34" charset="0"/>
+                          <a:ea typeface="Calibri" pitchFamily="34" charset="-122"/>
+                          <a:cs typeface="Calibri" pitchFamily="34" charset="-120"/>
+                        </a:rPr>
+                        <a:t>650 €</a:t>
+                      </a:r>
+                      <a:endParaRPr lang="en-US" sz="1350" dirty="0">
+                        <a:latin typeface="Calibri" charset="0"/>
+                        <a:ea typeface="Calibri" charset="0"/>
+                        <a:cs typeface="Calibri" charset="0"/>
+                      </a:endParaRPr>
+                    </a:p>
+                  </a:txBody>
+                  <a:tcPr marL="91440" marR="91440" marT="45720" marB="45720" anchor="ctr">
+                    <a:lnL w="12700" cap="flat" cmpd="sng" algn="ctr">
+                      <a:solidFill>
+                        <a:srgbClr val="D8E1E6"/>
+                      </a:solidFill>
+                      <a:prstDash val="solid"/>
+                      <a:round/>
+                      <a:headEnd type="none" w="med" len="med"/>
+                      <a:tailEnd type="none" w="med" len="med"/>
+                    </a:lnL>
+                    <a:lnR w="12700" cap="flat" cmpd="sng" algn="ctr">
+                      <a:solidFill>
+                        <a:srgbClr val="D8E1E6"/>
+                      </a:solidFill>
+                      <a:prstDash val="solid"/>
+                      <a:round/>
+                      <a:headEnd type="none" w="med" len="med"/>
+                      <a:tailEnd type="none" w="med" len="med"/>
+                    </a:lnR>
+                    <a:lnT w="12700" cap="flat" cmpd="sng" algn="ctr">
+                      <a:solidFill>
+                        <a:srgbClr val="D8E1E6"/>
+                      </a:solidFill>
+                      <a:prstDash val="solid"/>
+                      <a:round/>
+                      <a:headEnd type="none" w="med" len="med"/>
+                      <a:tailEnd type="none" w="med" len="med"/>
+                    </a:lnT>
+                    <a:lnB w="12700" cap="flat" cmpd="sng" algn="ctr">
+                      <a:solidFill>
+                        <a:srgbClr val="D8E1E6"/>
+                      </a:solidFill>
+                      <a:prstDash val="solid"/>
+                      <a:round/>
+                      <a:headEnd type="none" w="med" len="med"/>
+                      <a:tailEnd type="none" w="med" len="med"/>
+                    </a:lnB>
+                    <a:solidFill>
+                      <a:srgbClr val="FFFFFF"/>
+                    </a:solidFill>
+                  </a:tcPr>
+                </a:tc>
+              </a:tr>
+              <a:tr h="411480">
+                <a:tc>
+                  <a:txBody>
+                    <a:bodyPr/>
+                    <a:lstStyle/>
+                    <a:p>
+                      <a:pPr algn="l" indent="0" marL="0">
+                        <a:buNone/>
+                      </a:pPr>
+                      <a:r>
+                        <a:rPr lang="en-US" sz="1350" dirty="0">
+                          <a:solidFill>
+                            <a:srgbClr val="1A2B34"/>
+                          </a:solidFill>
+                          <a:latin typeface="Calibri" pitchFamily="34" charset="0"/>
+                          <a:ea typeface="Calibri" pitchFamily="34" charset="-122"/>
+                          <a:cs typeface="Calibri" pitchFamily="34" charset="-120"/>
+                        </a:rPr>
+                        <a:t>Samedi 9h – 13h</a:t>
+                      </a:r>
+                      <a:endParaRPr lang="en-US" sz="1350" dirty="0">
+                        <a:latin typeface="Calibri" charset="0"/>
+                        <a:ea typeface="Calibri" charset="0"/>
+                        <a:cs typeface="Calibri" charset="0"/>
+                      </a:endParaRPr>
+                    </a:p>
+                  </a:txBody>
+                  <a:tcPr marL="91440" marR="91440" marT="45720" marB="45720" anchor="ctr">
+                    <a:lnL w="12700" cap="flat" cmpd="sng" algn="ctr">
+                      <a:solidFill>
+                        <a:srgbClr val="D8E1E6"/>
+                      </a:solidFill>
+                      <a:prstDash val="solid"/>
+                      <a:round/>
+                      <a:headEnd type="none" w="med" len="med"/>
+                      <a:tailEnd type="none" w="med" len="med"/>
+                    </a:lnL>
+                    <a:lnR w="12700" cap="flat" cmpd="sng" algn="ctr">
+                      <a:solidFill>
+                        <a:srgbClr val="D8E1E6"/>
+                      </a:solidFill>
+                      <a:prstDash val="solid"/>
+                      <a:round/>
+                      <a:headEnd type="none" w="med" len="med"/>
+                      <a:tailEnd type="none" w="med" len="med"/>
+                    </a:lnR>
+                    <a:lnT w="12700" cap="flat" cmpd="sng" algn="ctr">
+                      <a:solidFill>
+                        <a:srgbClr val="D8E1E6"/>
+                      </a:solidFill>
+                      <a:prstDash val="solid"/>
+                      <a:round/>
+                      <a:headEnd type="none" w="med" len="med"/>
+                      <a:tailEnd type="none" w="med" len="med"/>
+                    </a:lnT>
+                    <a:lnB w="12700" cap="flat" cmpd="sng" algn="ctr">
+                      <a:solidFill>
+                        <a:srgbClr val="D8E1E6"/>
+                      </a:solidFill>
+                      <a:prstDash val="solid"/>
+                      <a:round/>
+                      <a:headEnd type="none" w="med" len="med"/>
+                      <a:tailEnd type="none" w="med" len="med"/>
+                    </a:lnB>
+                    <a:solidFill>
+                      <a:srgbClr val="FFFFFF"/>
+                    </a:solidFill>
+                  </a:tcPr>
+                </a:tc>
+                <a:tc>
+                  <a:txBody>
+                    <a:bodyPr/>
+                    <a:lstStyle/>
+                    <a:p>
+                      <a:pPr algn="l" indent="0" marL="0">
+                        <a:buNone/>
+                      </a:pPr>
+                      <a:r>
+                        <a:rPr lang="en-US" sz="1350" dirty="0">
+                          <a:solidFill>
+                            <a:srgbClr val="1A2B34"/>
+                          </a:solidFill>
+                          <a:latin typeface="Calibri" pitchFamily="34" charset="0"/>
+                          <a:ea typeface="Calibri" pitchFamily="34" charset="-122"/>
+                          <a:cs typeface="Calibri" pitchFamily="34" charset="-120"/>
+                        </a:rPr>
+                        <a:t>Matinée du samedi</a:t>
+                      </a:r>
+                      <a:endParaRPr lang="en-US" sz="1350" dirty="0">
+                        <a:latin typeface="Calibri" charset="0"/>
+                        <a:ea typeface="Calibri" charset="0"/>
+                        <a:cs typeface="Calibri" charset="0"/>
+                      </a:endParaRPr>
+                    </a:p>
+                  </a:txBody>
+                  <a:tcPr marL="91440" marR="91440" marT="45720" marB="45720" anchor="ctr">
+                    <a:lnL w="12700" cap="flat" cmpd="sng" algn="ctr">
+                      <a:solidFill>
+                        <a:srgbClr val="D8E1E6"/>
+                      </a:solidFill>
+                      <a:prstDash val="solid"/>
+                      <a:round/>
+                      <a:headEnd type="none" w="med" len="med"/>
+                      <a:tailEnd type="none" w="med" len="med"/>
+                    </a:lnL>
+                    <a:lnR w="12700" cap="flat" cmpd="sng" algn="ctr">
+                      <a:solidFill>
+                        <a:srgbClr val="D8E1E6"/>
+                      </a:solidFill>
+                      <a:prstDash val="solid"/>
+                      <a:round/>
+                      <a:headEnd type="none" w="med" len="med"/>
+                      <a:tailEnd type="none" w="med" len="med"/>
+                    </a:lnR>
+                    <a:lnT w="12700" cap="flat" cmpd="sng" algn="ctr">
+                      <a:solidFill>
+                        <a:srgbClr val="D8E1E6"/>
+                      </a:solidFill>
+                      <a:prstDash val="solid"/>
+                      <a:round/>
+                      <a:headEnd type="none" w="med" len="med"/>
+                      <a:tailEnd type="none" w="med" len="med"/>
+                    </a:lnT>
+                    <a:lnB w="12700" cap="flat" cmpd="sng" algn="ctr">
+                      <a:solidFill>
+                        <a:srgbClr val="D8E1E6"/>
+                      </a:solidFill>
+                      <a:prstDash val="solid"/>
+                      <a:round/>
+                      <a:headEnd type="none" w="med" len="med"/>
+                      <a:tailEnd type="none" w="med" len="med"/>
+                    </a:lnB>
+                    <a:solidFill>
+                      <a:srgbClr val="FFFFFF"/>
+                    </a:solidFill>
+                  </a:tcPr>
+                </a:tc>
+                <a:tc>
+                  <a:txBody>
+                    <a:bodyPr/>
+                    <a:lstStyle/>
+                    <a:p>
+                      <a:pPr algn="r" indent="0" marL="0">
+                        <a:buNone/>
+                      </a:pPr>
+                      <a:r>
+                        <a:rPr lang="en-US" sz="1350" dirty="0">
+                          <a:solidFill>
+                            <a:srgbClr val="1A2B34"/>
+                          </a:solidFill>
+                          <a:latin typeface="Calibri" pitchFamily="34" charset="0"/>
+                          <a:ea typeface="Calibri" pitchFamily="34" charset="-122"/>
+                          <a:cs typeface="Calibri" pitchFamily="34" charset="-120"/>
+                        </a:rPr>
+                        <a:t>320 €</a:t>
+                      </a:r>
+                      <a:endParaRPr lang="en-US" sz="1350" dirty="0">
+                        <a:latin typeface="Calibri" charset="0"/>
+                        <a:ea typeface="Calibri" charset="0"/>
+                        <a:cs typeface="Calibri" charset="0"/>
+                      </a:endParaRPr>
+                    </a:p>
+                  </a:txBody>
+                  <a:tcPr marL="91440" marR="91440" marT="45720" marB="45720" anchor="ctr">
+                    <a:lnL w="12700" cap="flat" cmpd="sng" algn="ctr">
+                      <a:solidFill>
+                        <a:srgbClr val="D8E1E6"/>
+                      </a:solidFill>
+                      <a:prstDash val="solid"/>
+                      <a:round/>
+                      <a:headEnd type="none" w="med" len="med"/>
+                      <a:tailEnd type="none" w="med" len="med"/>
+                    </a:lnL>
+                    <a:lnR w="12700" cap="flat" cmpd="sng" algn="ctr">
+                      <a:solidFill>
+                        <a:srgbClr val="D8E1E6"/>
+                      </a:solidFill>
+                      <a:prstDash val="solid"/>
+                      <a:round/>
+                      <a:headEnd type="none" w="med" len="med"/>
+                      <a:tailEnd type="none" w="med" len="med"/>
+                    </a:lnR>
+                    <a:lnT w="12700" cap="flat" cmpd="sng" algn="ctr">
+                      <a:solidFill>
+                        <a:srgbClr val="D8E1E6"/>
+                      </a:solidFill>
+                      <a:prstDash val="solid"/>
+                      <a:round/>
+                      <a:headEnd type="none" w="med" len="med"/>
+                      <a:tailEnd type="none" w="med" len="med"/>
+                    </a:lnT>
+                    <a:lnB w="12700" cap="flat" cmpd="sng" algn="ctr">
+                      <a:solidFill>
+                        <a:srgbClr val="D8E1E6"/>
+                      </a:solidFill>
+                      <a:prstDash val="solid"/>
+                      <a:round/>
+                      <a:headEnd type="none" w="med" len="med"/>
+                      <a:tailEnd type="none" w="med" len="med"/>
+                    </a:lnB>
+                    <a:solidFill>
+                      <a:srgbClr val="FFFFFF"/>
+                    </a:solidFill>
+                  </a:tcPr>
+                </a:tc>
+              </a:tr>
+              <a:tr h="411480">
+                <a:tc>
+                  <a:txBody>
+                    <a:bodyPr/>
+                    <a:lstStyle/>
+                    <a:p>
+                      <a:pPr algn="l" indent="0" marL="0">
+                        <a:buNone/>
+                      </a:pPr>
+                      <a:r>
+                        <a:rPr lang="en-US" sz="1350" dirty="0">
+                          <a:solidFill>
+                            <a:srgbClr val="1A2B34"/>
+                          </a:solidFill>
+                          <a:latin typeface="Calibri" pitchFamily="34" charset="0"/>
+                          <a:ea typeface="Calibri" pitchFamily="34" charset="-122"/>
+                          <a:cs typeface="Calibri" pitchFamily="34" charset="-120"/>
+                        </a:rPr>
+                        <a:t>Samedi 9h – 18h</a:t>
+                      </a:r>
+                      <a:endParaRPr lang="en-US" sz="1350" dirty="0">
+                        <a:latin typeface="Calibri" charset="0"/>
+                        <a:ea typeface="Calibri" charset="0"/>
+                        <a:cs typeface="Calibri" charset="0"/>
+                      </a:endParaRPr>
+                    </a:p>
+                  </a:txBody>
+                  <a:tcPr marL="91440" marR="91440" marT="45720" marB="45720" anchor="ctr">
+                    <a:lnL w="12700" cap="flat" cmpd="sng" algn="ctr">
+                      <a:solidFill>
+                        <a:srgbClr val="D8E1E6"/>
+                      </a:solidFill>
+                      <a:prstDash val="solid"/>
+                      <a:round/>
+                      <a:headEnd type="none" w="med" len="med"/>
+                      <a:tailEnd type="none" w="med" len="med"/>
+                    </a:lnL>
+                    <a:lnR w="12700" cap="flat" cmpd="sng" algn="ctr">
+                      <a:solidFill>
+                        <a:srgbClr val="D8E1E6"/>
+                      </a:solidFill>
+                      <a:prstDash val="solid"/>
+                      <a:round/>
+                      <a:headEnd type="none" w="med" len="med"/>
+                      <a:tailEnd type="none" w="med" len="med"/>
+                    </a:lnR>
+                    <a:lnT w="12700" cap="flat" cmpd="sng" algn="ctr">
+                      <a:solidFill>
+                        <a:srgbClr val="D8E1E6"/>
+                      </a:solidFill>
+                      <a:prstDash val="solid"/>
+                      <a:round/>
+                      <a:headEnd type="none" w="med" len="med"/>
+                      <a:tailEnd type="none" w="med" len="med"/>
+                    </a:lnT>
+                    <a:lnB w="12700" cap="flat" cmpd="sng" algn="ctr">
+                      <a:solidFill>
+                        <a:srgbClr val="D8E1E6"/>
+                      </a:solidFill>
+                      <a:prstDash val="solid"/>
+                      <a:round/>
+                      <a:headEnd type="none" w="med" len="med"/>
+                      <a:tailEnd type="none" w="med" len="med"/>
+                    </a:lnB>
+                    <a:solidFill>
+                      <a:srgbClr val="FFFFFF"/>
+                    </a:solidFill>
+                  </a:tcPr>
+                </a:tc>
+                <a:tc>
+                  <a:txBody>
+                    <a:bodyPr/>
+                    <a:lstStyle/>
+                    <a:p>
+                      <a:pPr algn="l" indent="0" marL="0">
+                        <a:buNone/>
+                      </a:pPr>
+                      <a:r>
+                        <a:rPr lang="en-US" sz="1350" dirty="0">
+                          <a:solidFill>
+                            <a:srgbClr val="1A2B34"/>
+                          </a:solidFill>
+                          <a:latin typeface="Calibri" pitchFamily="34" charset="0"/>
+                          <a:ea typeface="Calibri" pitchFamily="34" charset="-122"/>
+                          <a:cs typeface="Calibri" pitchFamily="34" charset="-120"/>
+                        </a:rPr>
+                        <a:t>Journée du samedi</a:t>
+                      </a:r>
+                      <a:endParaRPr lang="en-US" sz="1350" dirty="0">
+                        <a:latin typeface="Calibri" charset="0"/>
+                        <a:ea typeface="Calibri" charset="0"/>
+                        <a:cs typeface="Calibri" charset="0"/>
+                      </a:endParaRPr>
+                    </a:p>
+                  </a:txBody>
+                  <a:tcPr marL="91440" marR="91440" marT="45720" marB="45720" anchor="ctr">
+                    <a:lnL w="12700" cap="flat" cmpd="sng" algn="ctr">
+                      <a:solidFill>
+                        <a:srgbClr val="D8E1E6"/>
+                      </a:solidFill>
+                      <a:prstDash val="solid"/>
+                      <a:round/>
+                      <a:headEnd type="none" w="med" len="med"/>
+                      <a:tailEnd type="none" w="med" len="med"/>
+                    </a:lnL>
+                    <a:lnR w="12700" cap="flat" cmpd="sng" algn="ctr">
+                      <a:solidFill>
+                        <a:srgbClr val="D8E1E6"/>
+                      </a:solidFill>
+                      <a:prstDash val="solid"/>
+                      <a:round/>
+                      <a:headEnd type="none" w="med" len="med"/>
+                      <a:tailEnd type="none" w="med" len="med"/>
+                    </a:lnR>
+                    <a:lnT w="12700" cap="flat" cmpd="sng" algn="ctr">
+                      <a:solidFill>
+                        <a:srgbClr val="D8E1E6"/>
+                      </a:solidFill>
+                      <a:prstDash val="solid"/>
+                      <a:round/>
+                      <a:headEnd type="none" w="med" len="med"/>
+                      <a:tailEnd type="none" w="med" len="med"/>
+                    </a:lnT>
+                    <a:lnB w="12700" cap="flat" cmpd="sng" algn="ctr">
+                      <a:solidFill>
+                        <a:srgbClr val="D8E1E6"/>
+                      </a:solidFill>
+                      <a:prstDash val="solid"/>
+                      <a:round/>
+                      <a:headEnd type="none" w="med" len="med"/>
+                      <a:tailEnd type="none" w="med" len="med"/>
+                    </a:lnB>
+                    <a:solidFill>
+                      <a:srgbClr val="FFFFFF"/>
+                    </a:solidFill>
+                  </a:tcPr>
+                </a:tc>
+                <a:tc>
+                  <a:txBody>
+                    <a:bodyPr/>
+                    <a:lstStyle/>
+                    <a:p>
+                      <a:pPr algn="r" indent="0" marL="0">
+                        <a:buNone/>
+                      </a:pPr>
+                      <a:r>
+                        <a:rPr lang="en-US" sz="1350" dirty="0">
+                          <a:solidFill>
+                            <a:srgbClr val="1A2B34"/>
+                          </a:solidFill>
+                          <a:latin typeface="Calibri" pitchFamily="34" charset="0"/>
+                          <a:ea typeface="Calibri" pitchFamily="34" charset="-122"/>
+                          <a:cs typeface="Calibri" pitchFamily="34" charset="-120"/>
+                        </a:rPr>
+                        <a:t>700 €</a:t>
+                      </a:r>
+                      <a:endParaRPr lang="en-US" sz="1350" dirty="0">
+                        <a:latin typeface="Calibri" charset="0"/>
+                        <a:ea typeface="Calibri" charset="0"/>
+                        <a:cs typeface="Calibri" charset="0"/>
+                      </a:endParaRPr>
+                    </a:p>
+                  </a:txBody>
+                  <a:tcPr marL="91440" marR="91440" marT="45720" marB="45720" anchor="ctr">
+                    <a:lnL w="12700" cap="flat" cmpd="sng" algn="ctr">
+                      <a:solidFill>
+                        <a:srgbClr val="D8E1E6"/>
+                      </a:solidFill>
+                      <a:prstDash val="solid"/>
+                      <a:round/>
+                      <a:headEnd type="none" w="med" len="med"/>
+                      <a:tailEnd type="none" w="med" len="med"/>
+                    </a:lnL>
+                    <a:lnR w="12700" cap="flat" cmpd="sng" algn="ctr">
+                      <a:solidFill>
+                        <a:srgbClr val="D8E1E6"/>
+                      </a:solidFill>
+                      <a:prstDash val="solid"/>
+                      <a:round/>
+                      <a:headEnd type="none" w="med" len="med"/>
+                      <a:tailEnd type="none" w="med" len="med"/>
+                    </a:lnR>
+                    <a:lnT w="12700" cap="flat" cmpd="sng" algn="ctr">
+                      <a:solidFill>
+                        <a:srgbClr val="D8E1E6"/>
+                      </a:solidFill>
+                      <a:prstDash val="solid"/>
+                      <a:round/>
+                      <a:headEnd type="none" w="med" len="med"/>
+                      <a:tailEnd type="none" w="med" len="med"/>
+                    </a:lnT>
+                    <a:lnB w="12700" cap="flat" cmpd="sng" algn="ctr">
+                      <a:solidFill>
+                        <a:srgbClr val="D8E1E6"/>
+                      </a:solidFill>
+                      <a:prstDash val="solid"/>
+                      <a:round/>
+                      <a:headEnd type="none" w="med" len="med"/>
+                      <a:tailEnd type="none" w="med" len="med"/>
+                    </a:lnB>
+                    <a:solidFill>
+                      <a:srgbClr val="FFFFFF"/>
+                    </a:solidFill>
+                  </a:tcPr>
+                </a:tc>
+              </a:tr>
+              <a:tr h="411480">
+                <a:tc>
+                  <a:txBody>
+                    <a:bodyPr/>
+                    <a:lstStyle/>
+                    <a:p>
+                      <a:pPr algn="l" indent="0" marL="0">
+                        <a:buNone/>
+                      </a:pPr>
+                      <a:r>
+                        <a:rPr lang="en-US" sz="1350" dirty="0">
+                          <a:solidFill>
+                            <a:srgbClr val="1A2B34"/>
+                          </a:solidFill>
+                          <a:latin typeface="Calibri" pitchFamily="34" charset="0"/>
+                          <a:ea typeface="Calibri" pitchFamily="34" charset="-122"/>
+                          <a:cs typeface="Calibri" pitchFamily="34" charset="-120"/>
+                        </a:rPr>
+                        <a:t>Dimanche ou jour férié, 9h – 18h</a:t>
+                      </a:r>
+                      <a:endParaRPr lang="en-US" sz="1350" dirty="0">
+                        <a:latin typeface="Calibri" charset="0"/>
+                        <a:ea typeface="Calibri" charset="0"/>
+                        <a:cs typeface="Calibri" charset="0"/>
+                      </a:endParaRPr>
+                    </a:p>
+                  </a:txBody>
+                  <a:tcPr marL="91440" marR="91440" marT="45720" marB="45720" anchor="ctr">
+                    <a:lnL w="12700" cap="flat" cmpd="sng" algn="ctr">
+                      <a:solidFill>
+                        <a:srgbClr val="D8E1E6"/>
+                      </a:solidFill>
+                      <a:prstDash val="solid"/>
+                      <a:round/>
+                      <a:headEnd type="none" w="med" len="med"/>
+                      <a:tailEnd type="none" w="med" len="med"/>
+                    </a:lnL>
+                    <a:lnR w="12700" cap="flat" cmpd="sng" algn="ctr">
+                      <a:solidFill>
+                        <a:srgbClr val="D8E1E6"/>
+                      </a:solidFill>
+                      <a:prstDash val="solid"/>
+                      <a:round/>
+                      <a:headEnd type="none" w="med" len="med"/>
+                      <a:tailEnd type="none" w="med" len="med"/>
+                    </a:lnR>
+                    <a:lnT w="12700" cap="flat" cmpd="sng" algn="ctr">
+                      <a:solidFill>
+                        <a:srgbClr val="D8E1E6"/>
+                      </a:solidFill>
+                      <a:prstDash val="solid"/>
+                      <a:round/>
+                      <a:headEnd type="none" w="med" len="med"/>
+                      <a:tailEnd type="none" w="med" len="med"/>
+                    </a:lnT>
+                    <a:lnB w="12700" cap="flat" cmpd="sng" algn="ctr">
+                      <a:solidFill>
+                        <a:srgbClr val="D8E1E6"/>
+                      </a:solidFill>
+                      <a:prstDash val="solid"/>
+                      <a:round/>
+                      <a:headEnd type="none" w="med" len="med"/>
+                      <a:tailEnd type="none" w="med" len="med"/>
+                    </a:lnB>
+                    <a:solidFill>
+                      <a:srgbClr val="FFFFFF"/>
+                    </a:solidFill>
+                  </a:tcPr>
+                </a:tc>
+                <a:tc>
+                  <a:txBody>
+                    <a:bodyPr/>
+                    <a:lstStyle/>
+                    <a:p>
+                      <a:pPr algn="l" indent="0" marL="0">
+                        <a:buNone/>
+                      </a:pPr>
+                      <a:r>
+                        <a:rPr lang="en-US" sz="1350" dirty="0">
+                          <a:solidFill>
+                            <a:srgbClr val="1A2B34"/>
+                          </a:solidFill>
+                          <a:latin typeface="Calibri" pitchFamily="34" charset="0"/>
+                          <a:ea typeface="Calibri" pitchFamily="34" charset="-122"/>
+                          <a:cs typeface="Calibri" pitchFamily="34" charset="-120"/>
+                        </a:rPr>
+                        <a:t>À la journée, sur demande</a:t>
+                      </a:r>
+                      <a:endParaRPr lang="en-US" sz="1350" dirty="0">
+                        <a:latin typeface="Calibri" charset="0"/>
+                        <a:ea typeface="Calibri" charset="0"/>
+                        <a:cs typeface="Calibri" charset="0"/>
+                      </a:endParaRPr>
+                    </a:p>
+                  </a:txBody>
+                  <a:tcPr marL="91440" marR="91440" marT="45720" marB="45720" anchor="ctr">
+                    <a:lnL w="12700" cap="flat" cmpd="sng" algn="ctr">
+                      <a:solidFill>
+                        <a:srgbClr val="D8E1E6"/>
+                      </a:solidFill>
+                      <a:prstDash val="solid"/>
+                      <a:round/>
+                      <a:headEnd type="none" w="med" len="med"/>
+                      <a:tailEnd type="none" w="med" len="med"/>
+                    </a:lnL>
+                    <a:lnR w="12700" cap="flat" cmpd="sng" algn="ctr">
+                      <a:solidFill>
+                        <a:srgbClr val="D8E1E6"/>
+                      </a:solidFill>
+                      <a:prstDash val="solid"/>
+                      <a:round/>
+                      <a:headEnd type="none" w="med" len="med"/>
+                      <a:tailEnd type="none" w="med" len="med"/>
+                    </a:lnR>
+                    <a:lnT w="12700" cap="flat" cmpd="sng" algn="ctr">
+                      <a:solidFill>
+                        <a:srgbClr val="D8E1E6"/>
+                      </a:solidFill>
+                      <a:prstDash val="solid"/>
+                      <a:round/>
+                      <a:headEnd type="none" w="med" len="med"/>
+                      <a:tailEnd type="none" w="med" len="med"/>
+                    </a:lnT>
+                    <a:lnB w="12700" cap="flat" cmpd="sng" algn="ctr">
+                      <a:solidFill>
+                        <a:srgbClr val="D8E1E6"/>
+                      </a:solidFill>
+                      <a:prstDash val="solid"/>
+                      <a:round/>
+                      <a:headEnd type="none" w="med" len="med"/>
+                      <a:tailEnd type="none" w="med" len="med"/>
+                    </a:lnB>
+                    <a:solidFill>
+                      <a:srgbClr val="FFFFFF"/>
+                    </a:solidFill>
+                  </a:tcPr>
+                </a:tc>
+                <a:tc>
+                  <a:txBody>
+                    <a:bodyPr/>
+                    <a:lstStyle/>
+                    <a:p>
+                      <a:pPr algn="r" indent="0" marL="0">
+                        <a:buNone/>
+                      </a:pPr>
+                      <a:r>
+                        <a:rPr lang="en-US" sz="1350" dirty="0">
+                          <a:solidFill>
+                            <a:srgbClr val="1A2B34"/>
+                          </a:solidFill>
+                          <a:latin typeface="Calibri" pitchFamily="34" charset="0"/>
+                          <a:ea typeface="Calibri" pitchFamily="34" charset="-122"/>
+                          <a:cs typeface="Calibri" pitchFamily="34" charset="-120"/>
+                        </a:rPr>
+                        <a:t>190 € / jour</a:t>
+                      </a:r>
+                      <a:endParaRPr lang="en-US" sz="1350" dirty="0">
+                        <a:latin typeface="Calibri" charset="0"/>
+                        <a:ea typeface="Calibri" charset="0"/>
+                        <a:cs typeface="Calibri" charset="0"/>
+                      </a:endParaRPr>
+                    </a:p>
+                  </a:txBody>
+                  <a:tcPr marL="91440" marR="91440" marT="45720" marB="45720" anchor="ctr">
+                    <a:lnL w="12700" cap="flat" cmpd="sng" algn="ctr">
+                      <a:solidFill>
+                        <a:srgbClr val="D8E1E6"/>
+                      </a:solidFill>
+                      <a:prstDash val="solid"/>
+                      <a:round/>
+                      <a:headEnd type="none" w="med" len="med"/>
+                      <a:tailEnd type="none" w="med" len="med"/>
+                    </a:lnL>
+                    <a:lnR w="12700" cap="flat" cmpd="sng" algn="ctr">
+                      <a:solidFill>
+                        <a:srgbClr val="D8E1E6"/>
+                      </a:solidFill>
+                      <a:prstDash val="solid"/>
+                      <a:round/>
+                      <a:headEnd type="none" w="med" len="med"/>
+                      <a:tailEnd type="none" w="med" len="med"/>
+                    </a:lnR>
+                    <a:lnT w="12700" cap="flat" cmpd="sng" algn="ctr">
+                      <a:solidFill>
+                        <a:srgbClr val="D8E1E6"/>
+                      </a:solidFill>
+                      <a:prstDash val="solid"/>
+                      <a:round/>
+                      <a:headEnd type="none" w="med" len="med"/>
+                      <a:tailEnd type="none" w="med" len="med"/>
+                    </a:lnT>
+                    <a:lnB w="12700" cap="flat" cmpd="sng" algn="ctr">
+                      <a:solidFill>
+                        <a:srgbClr val="D8E1E6"/>
+                      </a:solidFill>
+                      <a:prstDash val="solid"/>
+                      <a:round/>
+                      <a:headEnd type="none" w="med" len="med"/>
+                      <a:tailEnd type="none" w="med" len="med"/>
+                    </a:lnB>
+                    <a:solidFill>
+                      <a:srgbClr val="FFFFFF"/>
+                    </a:solidFill>
+                  </a:tcPr>
+                </a:tc>
+              </a:tr>
+            </a:tbl>
+          </a:graphicData>
+        </a:graphic>
+      </p:graphicFrame>
+      <p:sp>
+        <p:nvSpPr>
+          <p:cNvPr id="6" name="Shape 3"/>
+          <p:cNvSpPr/>
+          <p:nvPr/>
+        </p:nvSpPr>
+        <p:spPr>
+          <a:xfrm>
+            <a:off x="594360" y="4892040"/>
+            <a:ext cx="10972800" cy="1005840"/>
+          </a:xfrm>
+          <a:prstGeom prst="roundRect">
+            <a:avLst>
+              <a:gd name="adj" fmla="val 8182"/>
+            </a:avLst>
+          </a:prstGeom>
+          <a:solidFill>
+            <a:srgbClr val="EDF2F5"/>
+          </a:solidFill>
+          <a:ln w="12700">
+            <a:solidFill>
+              <a:srgbClr val="EDF2F5"/>
+            </a:solidFill>
+            <a:prstDash val="solid"/>
+          </a:ln>
+        </p:spPr>
+      </p:sp>
+      <p:sp>
+        <p:nvSpPr>
+          <p:cNvPr id="7" name="Text 4"/>
+          <p:cNvSpPr/>
+          <p:nvPr/>
+        </p:nvSpPr>
+        <p:spPr>
+          <a:xfrm>
+            <a:off x="960120" y="4892040"/>
+            <a:ext cx="10241280" cy="1005840"/>
+          </a:xfrm>
+          <a:prstGeom prst="rect">
+            <a:avLst/>
+          </a:prstGeom>
+          <a:noFill/>
+          <a:ln/>
+        </p:spPr>
+        <p:txBody>
+          <a:bodyPr wrap="square" lIns="0" tIns="0" rIns="0" bIns="0" rtlCol="0" anchor="ctr"/>
+          <a:lstStyle/>
+          <a:p>
+            <a:pPr indent="0" marL="0">
+              <a:buNone/>
+            </a:pPr>
+            <a:r>
+              <a:rPr lang="en-US" sz="1250" dirty="0">
+                <a:solidFill>
+                  <a:srgbClr val="1A2B34"/>
+                </a:solidFill>
+                <a:latin typeface="Calibri" pitchFamily="34" charset="0"/>
+                <a:ea typeface="Calibri" pitchFamily="34" charset="-122"/>
+                <a:cs typeface="Calibri" pitchFamily="34" charset="-120"/>
+              </a:rPr>
+              <a:t>Le 7h – 9h de Paris tombe en pleine journée de bureau à Antananarivo : ni astreinte, ni prime de nuit, ni mauvaise volonté d'équipe. C'est le créneau que vous payez le plus cher en interne, et celui qui nous coûte le moins.</a:t>
+            </a:r>
+            <a:endParaRPr lang="en-US" sz="1250" dirty="0"/>
+          </a:p>
+        </p:txBody>
+      </p:sp>
+      <p:sp>
+        <p:nvSpPr>
+          <p:cNvPr id="8" name="Text 5"/>
+          <p:cNvSpPr/>
+          <p:nvPr/>
+        </p:nvSpPr>
+        <p:spPr>
+          <a:xfrm>
+            <a:off x="594360" y="6327648"/>
+            <a:ext cx="9966960" cy="274320"/>
+          </a:xfrm>
+          <a:prstGeom prst="rect">
+            <a:avLst/>
+          </a:prstGeom>
+          <a:noFill/>
+          <a:ln/>
+        </p:spPr>
+        <p:txBody>
+          <a:bodyPr wrap="square" lIns="0" tIns="0" rIns="0" bIns="0" rtlCol="0" anchor="ctr"/>
+          <a:lstStyle/>
+          <a:p>
+            <a:pPr indent="0" marL="0">
+              <a:buNone/>
+            </a:pPr>
+            <a:r>
+              <a:rPr lang="en-US" sz="1000" dirty="0">
+                <a:solidFill>
+                  <a:srgbClr val="6B7B85"/>
+                </a:solidFill>
+                <a:latin typeface="Calibri" pitchFamily="34" charset="0"/>
+                <a:ea typeface="Calibri" pitchFamily="34" charset="-122"/>
+                <a:cs typeface="Calibri" pitchFamily="34" charset="-120"/>
+              </a:rPr>
+              <a:t>Activable par avenant à tout moment. Heure de Paris dans tous les cas.</a:t>
+            </a:r>
+            <a:endParaRPr lang="en-US" sz="1000" dirty="0"/>
+          </a:p>
+        </p:txBody>
+      </p:sp>
+      <p:sp>
+        <p:nvSpPr>
+          <p:cNvPr id="9" name="Text 6"/>
+          <p:cNvSpPr/>
+          <p:nvPr/>
+        </p:nvSpPr>
+        <p:spPr>
+          <a:xfrm>
+            <a:off x="11018520" y="6327648"/>
+            <a:ext cx="548640" cy="274320"/>
+          </a:xfrm>
+          <a:prstGeom prst="rect">
+            <a:avLst/>
+          </a:prstGeom>
+          <a:noFill/>
+          <a:ln/>
+        </p:spPr>
+        <p:txBody>
+          <a:bodyPr wrap="square" lIns="0" tIns="0" rIns="0" bIns="0" rtlCol="0" anchor="ctr"/>
+          <a:lstStyle/>
+          <a:p>
+            <a:pPr algn="r" indent="0" marL="0">
+              <a:buNone/>
+            </a:pPr>
+            <a:r>
+              <a:rPr lang="en-US" sz="1000" dirty="0">
+                <a:solidFill>
+                  <a:srgbClr val="6B7B85"/>
+                </a:solidFill>
+                <a:latin typeface="Calibri" pitchFamily="34" charset="0"/>
+                <a:ea typeface="Calibri" pitchFamily="34" charset="-122"/>
+                <a:cs typeface="Calibri" pitchFamily="34" charset="-120"/>
+              </a:rPr>
+              <a:t>15</a:t>
+            </a:r>
+            <a:endParaRPr lang="en-US" sz="1000" dirty="0"/>
+          </a:p>
+        </p:txBody>
+      </p:sp>
+    </p:spTree>
+  </p:cSld>
+  <p:clrMapOvr>
+    <a:masterClrMapping/>
+  </p:clrMapOvr>
+</p:sld>
+</file>
+
 <file path=ppt/slides/slide2.xml><?xml version="1.0" encoding="utf-8"?>
 <p:sld xmlns:a="http://schemas.openxmlformats.org/drawingml/2006/main" xmlns:r="http://schemas.openxmlformats.org/officeDocument/2006/relationships" xmlns:p="http://schemas.openxmlformats.org/presentationml/2006/main">
   <p:cSld name="Slide 2">
